--- a/ASGMNT3/New Microsoft PowerPoint Presentation.pptx
+++ b/ASGMNT3/New Microsoft PowerPoint Presentation.pptx
@@ -5,17 +5,20 @@
     <p:sldMasterId id="2147483648" r:id="rId1"/>
   </p:sldMasterIdLst>
   <p:notesMasterIdLst>
-    <p:notesMasterId r:id="rId10"/>
+    <p:notesMasterId r:id="rId13"/>
   </p:notesMasterIdLst>
   <p:sldIdLst>
     <p:sldId id="256" r:id="rId2"/>
     <p:sldId id="257" r:id="rId3"/>
-    <p:sldId id="258" r:id="rId4"/>
-    <p:sldId id="259" r:id="rId5"/>
-    <p:sldId id="260" r:id="rId6"/>
-    <p:sldId id="261" r:id="rId7"/>
-    <p:sldId id="262" r:id="rId8"/>
-    <p:sldId id="263" r:id="rId9"/>
+    <p:sldId id="264" r:id="rId4"/>
+    <p:sldId id="258" r:id="rId5"/>
+    <p:sldId id="265" r:id="rId6"/>
+    <p:sldId id="266" r:id="rId7"/>
+    <p:sldId id="259" r:id="rId8"/>
+    <p:sldId id="260" r:id="rId9"/>
+    <p:sldId id="261" r:id="rId10"/>
+    <p:sldId id="262" r:id="rId11"/>
+    <p:sldId id="263" r:id="rId12"/>
   </p:sldIdLst>
   <p:sldSz cx="12192000" cy="6858000"/>
   <p:notesSz cx="6858000" cy="9144000"/>
@@ -114,6 +117,11 @@
       </a:defRPr>
     </a:lvl9pPr>
   </p:defaultTextStyle>
+  <p:extLst>
+    <p:ext uri="{EFAFB233-063F-42B5-8137-9DF3F51BA10A}">
+      <p15:sldGuideLst xmlns:p15="http://schemas.microsoft.com/office/powerpoint/2012/main"/>
+    </p:ext>
+  </p:extLst>
 </p:presentation>
 </file>
 
@@ -634,7 +642,7 @@
           <a:p>
             <a:fld id="{269ED01E-914A-41E4-88A0-C6BC45F53370}" type="slidenum">
               <a:rPr lang="en-US" smtClean="0"/>
-              <a:t>3</a:t>
+              <a:t>4</a:t>
             </a:fld>
             <a:endParaRPr lang="en-US"/>
           </a:p>
@@ -721,7 +729,7 @@
           <a:p>
             <a:fld id="{269ED01E-914A-41E4-88A0-C6BC45F53370}" type="slidenum">
               <a:rPr lang="en-US" smtClean="0"/>
-              <a:t>4</a:t>
+              <a:t>7</a:t>
             </a:fld>
             <a:endParaRPr lang="en-US"/>
           </a:p>
@@ -832,7 +840,7 @@
           <a:p>
             <a:fld id="{269ED01E-914A-41E4-88A0-C6BC45F53370}" type="slidenum">
               <a:rPr lang="en-US" smtClean="0"/>
-              <a:t>5</a:t>
+              <a:t>8</a:t>
             </a:fld>
             <a:endParaRPr lang="en-US"/>
           </a:p>
@@ -943,7 +951,7 @@
           <a:p>
             <a:fld id="{269ED01E-914A-41E4-88A0-C6BC45F53370}" type="slidenum">
               <a:rPr lang="en-US" smtClean="0"/>
-              <a:t>6</a:t>
+              <a:t>9</a:t>
             </a:fld>
             <a:endParaRPr lang="en-US"/>
           </a:p>
@@ -1054,7 +1062,7 @@
           <a:p>
             <a:fld id="{269ED01E-914A-41E4-88A0-C6BC45F53370}" type="slidenum">
               <a:rPr lang="en-US" smtClean="0"/>
-              <a:t>7</a:t>
+              <a:t>10</a:t>
             </a:fld>
             <a:endParaRPr lang="en-US"/>
           </a:p>
@@ -1165,7 +1173,7 @@
           <a:p>
             <a:fld id="{269ED01E-914A-41E4-88A0-C6BC45F53370}" type="slidenum">
               <a:rPr lang="en-US" smtClean="0"/>
-              <a:t>8</a:t>
+              <a:t>11</a:t>
             </a:fld>
             <a:endParaRPr lang="en-US"/>
           </a:p>
@@ -4461,6 +4469,134 @@
 </p:sld>
 </file>
 
+<file path=ppt/slides/slide10.xml><?xml version="1.0" encoding="utf-8"?>
+<p:sld xmlns:a="http://schemas.openxmlformats.org/drawingml/2006/main" xmlns:r="http://schemas.openxmlformats.org/officeDocument/2006/relationships" xmlns:p="http://schemas.openxmlformats.org/presentationml/2006/main">
+  <p:cSld>
+    <p:spTree>
+      <p:nvGrpSpPr>
+        <p:cNvPr id="1" name="">
+          <a:extLst>
+            <a:ext uri="{FF2B5EF4-FFF2-40B4-BE49-F238E27FC236}">
+              <a16:creationId xmlns:a16="http://schemas.microsoft.com/office/drawing/2014/main" id="{701443C0-5831-67B6-D214-3A26D4C6E323}"/>
+            </a:ext>
+          </a:extLst>
+        </p:cNvPr>
+        <p:cNvGrpSpPr/>
+        <p:nvPr/>
+      </p:nvGrpSpPr>
+      <p:grpSpPr>
+        <a:xfrm>
+          <a:off x="0" y="0"/>
+          <a:ext cx="0" cy="0"/>
+          <a:chOff x="0" y="0"/>
+          <a:chExt cx="0" cy="0"/>
+        </a:xfrm>
+      </p:grpSpPr>
+      <p:sp>
+        <p:nvSpPr>
+          <p:cNvPr id="2" name="Title 1">
+            <a:extLst>
+              <a:ext uri="{FF2B5EF4-FFF2-40B4-BE49-F238E27FC236}">
+                <a16:creationId xmlns:a16="http://schemas.microsoft.com/office/drawing/2014/main" id="{7CA0897B-ED9E-6382-1775-8C38E586EADA}"/>
+              </a:ext>
+            </a:extLst>
+          </p:cNvPr>
+          <p:cNvSpPr>
+            <a:spLocks noGrp="1"/>
+          </p:cNvSpPr>
+          <p:nvPr>
+            <p:ph type="title"/>
+          </p:nvPr>
+        </p:nvSpPr>
+        <p:spPr/>
+        <p:txBody>
+          <a:bodyPr/>
+          <a:lstStyle/>
+          <a:p>
+            <a:r>
+              <a:rPr lang="en-US" dirty="0"/>
+              <a:t>Other Requirements</a:t>
+            </a:r>
+          </a:p>
+        </p:txBody>
+      </p:sp>
+    </p:spTree>
+    <p:extLst>
+      <p:ext uri="{BB962C8B-B14F-4D97-AF65-F5344CB8AC3E}">
+        <p14:creationId xmlns:p14="http://schemas.microsoft.com/office/powerpoint/2010/main" val="2018098577"/>
+      </p:ext>
+    </p:extLst>
+  </p:cSld>
+  <p:clrMapOvr>
+    <a:masterClrMapping/>
+  </p:clrMapOvr>
+</p:sld>
+</file>
+
+<file path=ppt/slides/slide11.xml><?xml version="1.0" encoding="utf-8"?>
+<p:sld xmlns:a="http://schemas.openxmlformats.org/drawingml/2006/main" xmlns:r="http://schemas.openxmlformats.org/officeDocument/2006/relationships" xmlns:p="http://schemas.openxmlformats.org/presentationml/2006/main">
+  <p:cSld>
+    <p:spTree>
+      <p:nvGrpSpPr>
+        <p:cNvPr id="1" name="">
+          <a:extLst>
+            <a:ext uri="{FF2B5EF4-FFF2-40B4-BE49-F238E27FC236}">
+              <a16:creationId xmlns:a16="http://schemas.microsoft.com/office/drawing/2014/main" id="{C2D24A11-D06A-C1CA-15C1-CF4950357AE2}"/>
+            </a:ext>
+          </a:extLst>
+        </p:cNvPr>
+        <p:cNvGrpSpPr/>
+        <p:nvPr/>
+      </p:nvGrpSpPr>
+      <p:grpSpPr>
+        <a:xfrm>
+          <a:off x="0" y="0"/>
+          <a:ext cx="0" cy="0"/>
+          <a:chOff x="0" y="0"/>
+          <a:chExt cx="0" cy="0"/>
+        </a:xfrm>
+      </p:grpSpPr>
+      <p:sp>
+        <p:nvSpPr>
+          <p:cNvPr id="2" name="Title 1">
+            <a:extLst>
+              <a:ext uri="{FF2B5EF4-FFF2-40B4-BE49-F238E27FC236}">
+                <a16:creationId xmlns:a16="http://schemas.microsoft.com/office/drawing/2014/main" id="{B7DE63B3-AF50-6302-048B-9AE131B90500}"/>
+              </a:ext>
+            </a:extLst>
+          </p:cNvPr>
+          <p:cNvSpPr>
+            <a:spLocks noGrp="1"/>
+          </p:cNvSpPr>
+          <p:nvPr>
+            <p:ph type="title"/>
+          </p:nvPr>
+        </p:nvSpPr>
+        <p:spPr/>
+        <p:txBody>
+          <a:bodyPr/>
+          <a:lstStyle/>
+          <a:p>
+            <a:r>
+              <a:rPr lang="en-US" dirty="0"/>
+              <a:t>User stories</a:t>
+            </a:r>
+          </a:p>
+        </p:txBody>
+      </p:sp>
+    </p:spTree>
+    <p:extLst>
+      <p:ext uri="{BB962C8B-B14F-4D97-AF65-F5344CB8AC3E}">
+        <p14:creationId xmlns:p14="http://schemas.microsoft.com/office/powerpoint/2010/main" val="2082572573"/>
+      </p:ext>
+    </p:extLst>
+  </p:cSld>
+  <p:clrMapOvr>
+    <a:masterClrMapping/>
+  </p:clrMapOvr>
+</p:sld>
+</file>
+
 <file path=ppt/slides/slide2.xml><?xml version="1.0" encoding="utf-8"?>
 <p:sld xmlns:a="http://schemas.openxmlformats.org/drawingml/2006/main" xmlns:r="http://schemas.openxmlformats.org/officeDocument/2006/relationships" xmlns:p="http://schemas.openxmlformats.org/presentationml/2006/main">
   <p:cSld>
@@ -4506,6 +4642,178 @@
           </a:p>
         </p:txBody>
       </p:sp>
+      <p:sp>
+        <p:nvSpPr>
+          <p:cNvPr id="3" name="TextBox 2">
+            <a:extLst>
+              <a:ext uri="{FF2B5EF4-FFF2-40B4-BE49-F238E27FC236}">
+                <a16:creationId xmlns:a16="http://schemas.microsoft.com/office/drawing/2014/main" id="{19EB5F87-5DE1-5BB0-67E1-44B411F2B2C8}"/>
+              </a:ext>
+            </a:extLst>
+          </p:cNvPr>
+          <p:cNvSpPr txBox="1"/>
+          <p:nvPr/>
+        </p:nvSpPr>
+        <p:spPr>
+          <a:xfrm>
+            <a:off x="506896" y="1432271"/>
+            <a:ext cx="7275444" cy="5632311"/>
+          </a:xfrm>
+          <a:prstGeom prst="rect">
+            <a:avLst/>
+          </a:prstGeom>
+          <a:noFill/>
+        </p:spPr>
+        <p:txBody>
+          <a:bodyPr wrap="square" rtlCol="0">
+            <a:spAutoFit/>
+          </a:bodyPr>
+          <a:lstStyle/>
+          <a:p>
+            <a:pPr marL="342900" indent="-342900">
+              <a:buFont typeface="+mj-lt"/>
+              <a:buAutoNum type="arabicPeriod"/>
+            </a:pPr>
+            <a:r>
+              <a:rPr lang="en-US" b="1" dirty="0">
+                <a:latin typeface="Arial" panose="020B0604020202020204" pitchFamily="34" charset="0"/>
+                <a:cs typeface="Arial" panose="020B0604020202020204" pitchFamily="34" charset="0"/>
+              </a:rPr>
+              <a:t>Purpose</a:t>
+            </a:r>
+            <a:r>
+              <a:rPr lang="en-US" dirty="0">
+                <a:latin typeface="Arial" panose="020B0604020202020204" pitchFamily="34" charset="0"/>
+                <a:cs typeface="Arial" panose="020B0604020202020204" pitchFamily="34" charset="0"/>
+              </a:rPr>
+              <a:t> - This Software Requirements Specification (SRS) document defines the software requirements for Studious, a study-themed web application designed to enhance productivity and collaboration for students and self-learners. This document specifies all functional and non-functional requirements for the Studious v1.0 release. It focuses on the web application portion of the system. Any unrelated components, such as mobile versions, End-to-end encryption, and AI implementation, are excluded.   </a:t>
+            </a:r>
+          </a:p>
+          <a:p>
+            <a:pPr marL="342900" indent="-342900">
+              <a:buFont typeface="+mj-lt"/>
+              <a:buAutoNum type="arabicPeriod"/>
+            </a:pPr>
+            <a:endParaRPr lang="en-US" dirty="0">
+              <a:latin typeface="Arial" panose="020B0604020202020204" pitchFamily="34" charset="0"/>
+              <a:cs typeface="Arial" panose="020B0604020202020204" pitchFamily="34" charset="0"/>
+            </a:endParaRPr>
+          </a:p>
+          <a:p>
+            <a:pPr marL="342900" indent="-342900">
+              <a:buFont typeface="+mj-lt"/>
+              <a:buAutoNum type="arabicPeriod"/>
+            </a:pPr>
+            <a:r>
+              <a:rPr lang="en-US" b="1" dirty="0">
+                <a:latin typeface="Arial" panose="020B0604020202020204" pitchFamily="34" charset="0"/>
+                <a:cs typeface="Arial" panose="020B0604020202020204" pitchFamily="34" charset="0"/>
+              </a:rPr>
+              <a:t>Document Conventions – </a:t>
+            </a:r>
+            <a:r>
+              <a:rPr lang="en-US" dirty="0">
+                <a:latin typeface="Arial" panose="020B0604020202020204" pitchFamily="34" charset="0"/>
+                <a:cs typeface="Arial" panose="020B0604020202020204" pitchFamily="34" charset="0"/>
+              </a:rPr>
+              <a:t>Headings, Bold Text, “Must” statements, and priorities explicitly stated for each major requirement and are not inherited by default </a:t>
+            </a:r>
+          </a:p>
+          <a:p>
+            <a:pPr marL="342900" indent="-342900">
+              <a:buFont typeface="+mj-lt"/>
+              <a:buAutoNum type="arabicPeriod"/>
+            </a:pPr>
+            <a:endParaRPr lang="en-US" dirty="0">
+              <a:latin typeface="Arial" panose="020B0604020202020204" pitchFamily="34" charset="0"/>
+              <a:cs typeface="Arial" panose="020B0604020202020204" pitchFamily="34" charset="0"/>
+            </a:endParaRPr>
+          </a:p>
+          <a:p>
+            <a:pPr marL="342900" indent="-342900">
+              <a:buFont typeface="+mj-lt"/>
+              <a:buAutoNum type="arabicPeriod"/>
+            </a:pPr>
+            <a:r>
+              <a:rPr lang="en-US" b="1" dirty="0">
+                <a:latin typeface="Arial" panose="020B0604020202020204" pitchFamily="34" charset="0"/>
+                <a:cs typeface="Arial" panose="020B0604020202020204" pitchFamily="34" charset="0"/>
+              </a:rPr>
+              <a:t>Intended Audience – </a:t>
+            </a:r>
+            <a:r>
+              <a:rPr lang="en-US" i="1" dirty="0">
+                <a:latin typeface="Arial" panose="020B0604020202020204" pitchFamily="34" charset="0"/>
+                <a:cs typeface="Arial" panose="020B0604020202020204" pitchFamily="34" charset="0"/>
+              </a:rPr>
+              <a:t>Developers</a:t>
+            </a:r>
+            <a:r>
+              <a:rPr lang="en-US" dirty="0">
+                <a:latin typeface="Arial" panose="020B0604020202020204" pitchFamily="34" charset="0"/>
+                <a:cs typeface="Arial" panose="020B0604020202020204" pitchFamily="34" charset="0"/>
+              </a:rPr>
+              <a:t> to understand system architecture/implement features, </a:t>
+            </a:r>
+            <a:r>
+              <a:rPr lang="en-US" i="1" dirty="0">
+                <a:latin typeface="Arial" panose="020B0604020202020204" pitchFamily="34" charset="0"/>
+                <a:cs typeface="Arial" panose="020B0604020202020204" pitchFamily="34" charset="0"/>
+              </a:rPr>
+              <a:t>Project Managers </a:t>
+            </a:r>
+            <a:r>
+              <a:rPr lang="en-US" dirty="0">
+                <a:latin typeface="Arial" panose="020B0604020202020204" pitchFamily="34" charset="0"/>
+                <a:cs typeface="Arial" panose="020B0604020202020204" pitchFamily="34" charset="0"/>
+              </a:rPr>
+              <a:t>to plan and manage deliverables and milestones, </a:t>
+            </a:r>
+            <a:r>
+              <a:rPr lang="en-US" i="1" dirty="0">
+                <a:latin typeface="Arial" panose="020B0604020202020204" pitchFamily="34" charset="0"/>
+                <a:cs typeface="Arial" panose="020B0604020202020204" pitchFamily="34" charset="0"/>
+              </a:rPr>
+              <a:t>testers</a:t>
+            </a:r>
+            <a:r>
+              <a:rPr lang="en-US" dirty="0">
+                <a:latin typeface="Arial" panose="020B0604020202020204" pitchFamily="34" charset="0"/>
+                <a:cs typeface="Arial" panose="020B0604020202020204" pitchFamily="34" charset="0"/>
+              </a:rPr>
+              <a:t> to develop test cases, and </a:t>
+            </a:r>
+            <a:r>
+              <a:rPr lang="en-US" i="1" dirty="0">
+                <a:latin typeface="Arial" panose="020B0604020202020204" pitchFamily="34" charset="0"/>
+                <a:cs typeface="Arial" panose="020B0604020202020204" pitchFamily="34" charset="0"/>
+              </a:rPr>
+              <a:t>stakeholders</a:t>
+            </a:r>
+            <a:r>
+              <a:rPr lang="en-US" dirty="0">
+                <a:latin typeface="Arial" panose="020B0604020202020204" pitchFamily="34" charset="0"/>
+                <a:cs typeface="Arial" panose="020B0604020202020204" pitchFamily="34" charset="0"/>
+              </a:rPr>
+              <a:t> to validate that the platform aligns with academic goals.</a:t>
+            </a:r>
+          </a:p>
+          <a:p>
+            <a:pPr marL="342900" indent="-342900">
+              <a:buFont typeface="+mj-lt"/>
+              <a:buAutoNum type="arabicPeriod"/>
+            </a:pPr>
+            <a:endParaRPr lang="en-US" b="1" dirty="0"/>
+          </a:p>
+          <a:p>
+            <a:pPr marL="285750" indent="-285750">
+              <a:buFont typeface="Arial" panose="020B0604020202020204" pitchFamily="34" charset="0"/>
+              <a:buChar char="•"/>
+            </a:pPr>
+            <a:endParaRPr lang="en-US" b="1" dirty="0"/>
+          </a:p>
+        </p:txBody>
+      </p:sp>
     </p:spTree>
     <p:extLst>
       <p:ext uri="{BB962C8B-B14F-4D97-AF65-F5344CB8AC3E}">
@@ -4520,6 +4828,289 @@
 </file>
 
 <file path=ppt/slides/slide3.xml><?xml version="1.0" encoding="utf-8"?>
+<p:sld xmlns:a="http://schemas.openxmlformats.org/drawingml/2006/main" xmlns:r="http://schemas.openxmlformats.org/officeDocument/2006/relationships" xmlns:p="http://schemas.openxmlformats.org/presentationml/2006/main">
+  <p:cSld>
+    <p:spTree>
+      <p:nvGrpSpPr>
+        <p:cNvPr id="1" name=""/>
+        <p:cNvGrpSpPr/>
+        <p:nvPr/>
+      </p:nvGrpSpPr>
+      <p:grpSpPr>
+        <a:xfrm>
+          <a:off x="0" y="0"/>
+          <a:ext cx="0" cy="0"/>
+          <a:chOff x="0" y="0"/>
+          <a:chExt cx="0" cy="0"/>
+        </a:xfrm>
+      </p:grpSpPr>
+      <p:sp>
+        <p:nvSpPr>
+          <p:cNvPr id="2" name="Title 1">
+            <a:extLst>
+              <a:ext uri="{FF2B5EF4-FFF2-40B4-BE49-F238E27FC236}">
+                <a16:creationId xmlns:a16="http://schemas.microsoft.com/office/drawing/2014/main" id="{AA6AE6CA-2470-21F2-E199-8888BD704C30}"/>
+              </a:ext>
+            </a:extLst>
+          </p:cNvPr>
+          <p:cNvSpPr>
+            <a:spLocks noGrp="1"/>
+          </p:cNvSpPr>
+          <p:nvPr>
+            <p:ph type="title"/>
+          </p:nvPr>
+        </p:nvSpPr>
+        <p:spPr/>
+        <p:txBody>
+          <a:bodyPr/>
+          <a:lstStyle/>
+          <a:p>
+            <a:r>
+              <a:rPr lang="en-US" dirty="0"/>
+              <a:t>Introduction</a:t>
+            </a:r>
+          </a:p>
+        </p:txBody>
+      </p:sp>
+      <p:sp>
+        <p:nvSpPr>
+          <p:cNvPr id="3" name="TextBox 2">
+            <a:extLst>
+              <a:ext uri="{FF2B5EF4-FFF2-40B4-BE49-F238E27FC236}">
+                <a16:creationId xmlns:a16="http://schemas.microsoft.com/office/drawing/2014/main" id="{5BA1BCCA-74BC-4196-E9AD-75FF08F5725C}"/>
+              </a:ext>
+            </a:extLst>
+          </p:cNvPr>
+          <p:cNvSpPr txBox="1"/>
+          <p:nvPr/>
+        </p:nvSpPr>
+        <p:spPr>
+          <a:xfrm>
+            <a:off x="838200" y="1868557"/>
+            <a:ext cx="6993835" cy="4616648"/>
+          </a:xfrm>
+          <a:prstGeom prst="rect">
+            <a:avLst/>
+          </a:prstGeom>
+          <a:noFill/>
+        </p:spPr>
+        <p:txBody>
+          <a:bodyPr wrap="square" rtlCol="0">
+            <a:spAutoFit/>
+          </a:bodyPr>
+          <a:lstStyle/>
+          <a:p>
+            <a:r>
+              <a:rPr lang="en-US" sz="1600" b="1" dirty="0">
+                <a:latin typeface="Arial" panose="020B0604020202020204" pitchFamily="34" charset="0"/>
+                <a:cs typeface="Arial" panose="020B0604020202020204" pitchFamily="34" charset="0"/>
+              </a:rPr>
+              <a:t>4. Product Scope: </a:t>
+            </a:r>
+            <a:r>
+              <a:rPr lang="en-US" sz="1600" dirty="0">
+                <a:latin typeface="Arial" panose="020B0604020202020204" pitchFamily="34" charset="0"/>
+                <a:cs typeface="Arial" panose="020B0604020202020204" pitchFamily="34" charset="0"/>
+              </a:rPr>
+              <a:t>The scope for Studious defines the boundaries, objectives, and key use cases for the application, focusing on its academic and collaborative features. For a detailed review of the scope of our application please refer to our </a:t>
+            </a:r>
+            <a:r>
+              <a:rPr lang="en-US" sz="1600" u="sng" dirty="0">
+                <a:latin typeface="Arial" panose="020B0604020202020204" pitchFamily="34" charset="0"/>
+                <a:cs typeface="Arial" panose="020B0604020202020204" pitchFamily="34" charset="0"/>
+                <a:hlinkClick r:id="rId2" action="ppaction://hlinkfile"/>
+              </a:rPr>
+              <a:t>Scope and Vision Document</a:t>
+            </a:r>
+            <a:r>
+              <a:rPr lang="en-US" sz="1600" dirty="0">
+                <a:latin typeface="Arial" panose="020B0604020202020204" pitchFamily="34" charset="0"/>
+                <a:cs typeface="Arial" panose="020B0604020202020204" pitchFamily="34" charset="0"/>
+              </a:rPr>
+              <a:t> located in the GitHub.</a:t>
+            </a:r>
+          </a:p>
+          <a:p>
+            <a:endParaRPr lang="en-US" dirty="0">
+              <a:latin typeface="Arial" panose="020B0604020202020204" pitchFamily="34" charset="0"/>
+              <a:cs typeface="Arial" panose="020B0604020202020204" pitchFamily="34" charset="0"/>
+            </a:endParaRPr>
+          </a:p>
+          <a:p>
+            <a:endParaRPr lang="en-US" b="1" dirty="0">
+              <a:latin typeface="Arial" panose="020B0604020202020204" pitchFamily="34" charset="0"/>
+              <a:cs typeface="Arial" panose="020B0604020202020204" pitchFamily="34" charset="0"/>
+            </a:endParaRPr>
+          </a:p>
+          <a:p>
+            <a:pPr lvl="0"/>
+            <a:r>
+              <a:rPr lang="en-US" sz="1600" b="1" dirty="0">
+                <a:latin typeface="Arial" panose="020B0604020202020204" pitchFamily="34" charset="0"/>
+                <a:cs typeface="Arial" panose="020B0604020202020204" pitchFamily="34" charset="0"/>
+              </a:rPr>
+              <a:t>5. References: </a:t>
+            </a:r>
+          </a:p>
+          <a:p>
+            <a:pPr lvl="0"/>
+            <a:r>
+              <a:rPr lang="en-US" sz="1600" b="1" dirty="0">
+                <a:latin typeface="Arial" panose="020B0604020202020204" pitchFamily="34" charset="0"/>
+                <a:cs typeface="Arial" panose="020B0604020202020204" pitchFamily="34" charset="0"/>
+              </a:rPr>
+              <a:t>* </a:t>
+            </a:r>
+            <a:r>
+              <a:rPr lang="en-US" sz="1600" dirty="0">
+                <a:latin typeface="Arial" panose="020B0604020202020204" pitchFamily="34" charset="0"/>
+                <a:cs typeface="Arial" panose="020B0604020202020204" pitchFamily="34" charset="0"/>
+              </a:rPr>
+              <a:t>IEEE Std. 830-1998: </a:t>
+            </a:r>
+            <a:r>
+              <a:rPr lang="en-US" sz="1600" i="1" dirty="0">
+                <a:latin typeface="Arial" panose="020B0604020202020204" pitchFamily="34" charset="0"/>
+                <a:cs typeface="Arial" panose="020B0604020202020204" pitchFamily="34" charset="0"/>
+              </a:rPr>
+              <a:t>IEEE Recommended Practice for Software Requirements Specifications</a:t>
+            </a:r>
+            <a:endParaRPr lang="en-US" sz="1600" dirty="0">
+              <a:latin typeface="Arial" panose="020B0604020202020204" pitchFamily="34" charset="0"/>
+              <a:cs typeface="Arial" panose="020B0604020202020204" pitchFamily="34" charset="0"/>
+            </a:endParaRPr>
+          </a:p>
+          <a:p>
+            <a:pPr lvl="0"/>
+            <a:r>
+              <a:rPr lang="en-US" sz="1600" dirty="0">
+                <a:latin typeface="Arial" panose="020B0604020202020204" pitchFamily="34" charset="0"/>
+                <a:cs typeface="Arial" panose="020B0604020202020204" pitchFamily="34" charset="0"/>
+              </a:rPr>
+              <a:t>*W3C Web Standards Documentation - </a:t>
+            </a:r>
+            <a:r>
+              <a:rPr lang="en-US" sz="1600" u="sng" dirty="0">
+                <a:latin typeface="Arial" panose="020B0604020202020204" pitchFamily="34" charset="0"/>
+                <a:cs typeface="Arial" panose="020B0604020202020204" pitchFamily="34" charset="0"/>
+                <a:hlinkClick r:id="rId3"/>
+              </a:rPr>
+              <a:t>https://www.w3.org/TR/html52/</a:t>
+            </a:r>
+            <a:endParaRPr lang="en-US" sz="1600" dirty="0">
+              <a:latin typeface="Arial" panose="020B0604020202020204" pitchFamily="34" charset="0"/>
+              <a:cs typeface="Arial" panose="020B0604020202020204" pitchFamily="34" charset="0"/>
+            </a:endParaRPr>
+          </a:p>
+          <a:p>
+            <a:pPr lvl="0"/>
+            <a:r>
+              <a:rPr lang="en-US" sz="1600" dirty="0">
+                <a:latin typeface="Arial" panose="020B0604020202020204" pitchFamily="34" charset="0"/>
+                <a:cs typeface="Arial" panose="020B0604020202020204" pitchFamily="34" charset="0"/>
+              </a:rPr>
+              <a:t>*MDN Web Docs - https://developer.mozilla.org/</a:t>
+            </a:r>
+          </a:p>
+          <a:p>
+            <a:pPr lvl="0"/>
+            <a:r>
+              <a:rPr lang="en-US" sz="1600" dirty="0">
+                <a:latin typeface="Arial" panose="020B0604020202020204" pitchFamily="34" charset="0"/>
+                <a:cs typeface="Arial" panose="020B0604020202020204" pitchFamily="34" charset="0"/>
+              </a:rPr>
+              <a:t>*React Developer Documentation - https://react.dev/</a:t>
+            </a:r>
+          </a:p>
+          <a:p>
+            <a:pPr lvl="0"/>
+            <a:r>
+              <a:rPr lang="en-US" sz="1600" dirty="0">
+                <a:latin typeface="Arial" panose="020B0604020202020204" pitchFamily="34" charset="0"/>
+                <a:cs typeface="Arial" panose="020B0604020202020204" pitchFamily="34" charset="0"/>
+              </a:rPr>
+              <a:t>*Node.js Official Documentation - https://nodejs.org/</a:t>
+            </a:r>
+          </a:p>
+          <a:p>
+            <a:pPr lvl="0"/>
+            <a:r>
+              <a:rPr lang="en-US" sz="1600" dirty="0">
+                <a:latin typeface="Arial" panose="020B0604020202020204" pitchFamily="34" charset="0"/>
+                <a:cs typeface="Arial" panose="020B0604020202020204" pitchFamily="34" charset="0"/>
+              </a:rPr>
+              <a:t>*PostgreSQL Documentation - </a:t>
+            </a:r>
+            <a:r>
+              <a:rPr lang="en-US" sz="1600" u="sng" dirty="0">
+                <a:latin typeface="Arial" panose="020B0604020202020204" pitchFamily="34" charset="0"/>
+                <a:cs typeface="Arial" panose="020B0604020202020204" pitchFamily="34" charset="0"/>
+                <a:hlinkClick r:id="rId4"/>
+              </a:rPr>
+              <a:t>https://www.postgresql.org/docs/</a:t>
+            </a:r>
+            <a:endParaRPr lang="en-US" sz="1600" dirty="0">
+              <a:latin typeface="Arial" panose="020B0604020202020204" pitchFamily="34" charset="0"/>
+              <a:cs typeface="Arial" panose="020B0604020202020204" pitchFamily="34" charset="0"/>
+            </a:endParaRPr>
+          </a:p>
+          <a:p>
+            <a:r>
+              <a:rPr lang="en-US" sz="1600" dirty="0">
+                <a:latin typeface="Arial" panose="020B0604020202020204" pitchFamily="34" charset="0"/>
+                <a:cs typeface="Arial" panose="020B0604020202020204" pitchFamily="34" charset="0"/>
+              </a:rPr>
+              <a:t>*Scope and Vision Document - </a:t>
+            </a:r>
+            <a:r>
+              <a:rPr lang="en-US" sz="1600" u="sng" dirty="0">
+                <a:latin typeface="Arial" panose="020B0604020202020204" pitchFamily="34" charset="0"/>
+                <a:cs typeface="Arial" panose="020B0604020202020204" pitchFamily="34" charset="0"/>
+                <a:hlinkClick r:id="rId5"/>
+              </a:rPr>
+              <a:t>https://github.com/hudcho/Studious/</a:t>
+            </a:r>
+            <a:r>
+              <a:rPr lang="en-US" sz="1600" dirty="0">
+                <a:latin typeface="Arial" panose="020B0604020202020204" pitchFamily="34" charset="0"/>
+                <a:cs typeface="Arial" panose="020B0604020202020204" pitchFamily="34" charset="0"/>
+              </a:rPr>
+              <a:t> </a:t>
+            </a:r>
+            <a:br>
+              <a:rPr lang="en-US" sz="1600" dirty="0">
+                <a:latin typeface="Arial" panose="020B0604020202020204" pitchFamily="34" charset="0"/>
+                <a:cs typeface="Arial" panose="020B0604020202020204" pitchFamily="34" charset="0"/>
+              </a:rPr>
+            </a:br>
+            <a:endParaRPr lang="en-US" sz="1600" dirty="0">
+              <a:latin typeface="Arial" panose="020B0604020202020204" pitchFamily="34" charset="0"/>
+              <a:cs typeface="Arial" panose="020B0604020202020204" pitchFamily="34" charset="0"/>
+            </a:endParaRPr>
+          </a:p>
+          <a:p>
+            <a:pPr marL="285750" indent="-285750">
+              <a:buFont typeface="Arial" panose="020B0604020202020204" pitchFamily="34" charset="0"/>
+              <a:buChar char="•"/>
+            </a:pPr>
+            <a:endParaRPr lang="en-US" b="1" dirty="0"/>
+          </a:p>
+        </p:txBody>
+      </p:sp>
+    </p:spTree>
+    <p:extLst>
+      <p:ext uri="{BB962C8B-B14F-4D97-AF65-F5344CB8AC3E}">
+        <p14:creationId xmlns:p14="http://schemas.microsoft.com/office/powerpoint/2010/main" val="3549960086"/>
+      </p:ext>
+    </p:extLst>
+  </p:cSld>
+  <p:clrMapOvr>
+    <a:masterClrMapping/>
+  </p:clrMapOvr>
+</p:sld>
+</file>
+
+<file path=ppt/slides/slide4.xml><?xml version="1.0" encoding="utf-8"?>
 <p:sld xmlns:a="http://schemas.openxmlformats.org/drawingml/2006/main" xmlns:r="http://schemas.openxmlformats.org/officeDocument/2006/relationships" xmlns:p="http://schemas.openxmlformats.org/presentationml/2006/main">
   <p:cSld>
     <p:spTree>
@@ -4570,6 +5161,175 @@
           </a:p>
         </p:txBody>
       </p:sp>
+      <p:sp>
+        <p:nvSpPr>
+          <p:cNvPr id="5" name="TextBox 4">
+            <a:extLst>
+              <a:ext uri="{FF2B5EF4-FFF2-40B4-BE49-F238E27FC236}">
+                <a16:creationId xmlns:a16="http://schemas.microsoft.com/office/drawing/2014/main" id="{E3CDCAAF-4A23-6CDA-0BA8-7AEC1AD4E0B7}"/>
+              </a:ext>
+            </a:extLst>
+          </p:cNvPr>
+          <p:cNvSpPr txBox="1"/>
+          <p:nvPr/>
+        </p:nvSpPr>
+        <p:spPr>
+          <a:xfrm>
+            <a:off x="838200" y="1848678"/>
+            <a:ext cx="6546574" cy="3139321"/>
+          </a:xfrm>
+          <a:prstGeom prst="rect">
+            <a:avLst/>
+          </a:prstGeom>
+          <a:noFill/>
+        </p:spPr>
+        <p:txBody>
+          <a:bodyPr wrap="square" rtlCol="0">
+            <a:spAutoFit/>
+          </a:bodyPr>
+          <a:lstStyle/>
+          <a:p>
+            <a:pPr marL="342900" indent="-342900">
+              <a:buFont typeface="+mj-lt"/>
+              <a:buAutoNum type="arabicPeriod"/>
+            </a:pPr>
+            <a:r>
+              <a:rPr lang="en-US" b="1" dirty="0"/>
+              <a:t>Product Perspective: </a:t>
+            </a:r>
+            <a:r>
+              <a:rPr lang="en-US" dirty="0"/>
+              <a:t>Studious will be deployed using modern web technologies, including: </a:t>
+            </a:r>
+          </a:p>
+          <a:p>
+            <a:pPr marL="285750" lvl="0" indent="-285750">
+              <a:buFont typeface="Arial" panose="020B0604020202020204" pitchFamily="34" charset="0"/>
+              <a:buChar char="•"/>
+            </a:pPr>
+            <a:r>
+              <a:rPr lang="en-US" b="1" dirty="0"/>
+              <a:t>Frontend:</a:t>
+            </a:r>
+            <a:r>
+              <a:rPr lang="en-US" dirty="0"/>
+              <a:t> React (with Tailwind CSS for UI styling)</a:t>
+            </a:r>
+          </a:p>
+          <a:p>
+            <a:pPr marL="285750" lvl="0" indent="-285750">
+              <a:buFont typeface="Arial" panose="020B0604020202020204" pitchFamily="34" charset="0"/>
+              <a:buChar char="•"/>
+            </a:pPr>
+            <a:r>
+              <a:rPr lang="en-US" b="1" dirty="0"/>
+              <a:t>Backend:</a:t>
+            </a:r>
+            <a:r>
+              <a:rPr lang="en-US" dirty="0"/>
+              <a:t> Node.js and Express</a:t>
+            </a:r>
+          </a:p>
+          <a:p>
+            <a:pPr marL="285750" lvl="0" indent="-285750">
+              <a:buFont typeface="Arial" panose="020B0604020202020204" pitchFamily="34" charset="0"/>
+              <a:buChar char="•"/>
+            </a:pPr>
+            <a:r>
+              <a:rPr lang="en-US" b="1" dirty="0"/>
+              <a:t>Database:</a:t>
+            </a:r>
+            <a:r>
+              <a:rPr lang="en-US" dirty="0"/>
+              <a:t> PostgreSQL</a:t>
+            </a:r>
+          </a:p>
+          <a:p>
+            <a:pPr marL="285750" lvl="0" indent="-285750">
+              <a:buFont typeface="Arial" panose="020B0604020202020204" pitchFamily="34" charset="0"/>
+              <a:buChar char="•"/>
+            </a:pPr>
+            <a:r>
+              <a:rPr lang="en-US" b="1" dirty="0"/>
+              <a:t>Real-Time Communication:</a:t>
+            </a:r>
+            <a:r>
+              <a:rPr lang="en-US" dirty="0"/>
+              <a:t> Socket.io</a:t>
+            </a:r>
+          </a:p>
+          <a:p>
+            <a:pPr marL="285750" lvl="0" indent="-285750">
+              <a:buFont typeface="Arial" panose="020B0604020202020204" pitchFamily="34" charset="0"/>
+              <a:buChar char="•"/>
+            </a:pPr>
+            <a:r>
+              <a:rPr lang="en-US" b="1" dirty="0"/>
+              <a:t>Deployment:</a:t>
+            </a:r>
+            <a:r>
+              <a:rPr lang="en-US" dirty="0"/>
+              <a:t> Frontend hosted on </a:t>
+            </a:r>
+            <a:r>
+              <a:rPr lang="en-US" dirty="0" err="1"/>
+              <a:t>Vercel</a:t>
+            </a:r>
+            <a:r>
+              <a:rPr lang="en-US" dirty="0"/>
+              <a:t>, Backend hosted on Render</a:t>
+            </a:r>
+          </a:p>
+          <a:p>
+            <a:pPr marL="285750" lvl="0" indent="-285750">
+              <a:buFont typeface="Arial" panose="020B0604020202020204" pitchFamily="34" charset="0"/>
+              <a:buChar char="•"/>
+            </a:pPr>
+            <a:endParaRPr lang="en-US" dirty="0"/>
+          </a:p>
+          <a:p>
+            <a:pPr lvl="0"/>
+            <a:endParaRPr lang="en-US" dirty="0"/>
+          </a:p>
+          <a:p>
+            <a:pPr marL="285750" indent="-285750">
+              <a:buFont typeface="Arial" panose="020B0604020202020204" pitchFamily="34" charset="0"/>
+              <a:buChar char="•"/>
+            </a:pPr>
+            <a:endParaRPr lang="en-US" b="1" dirty="0"/>
+          </a:p>
+        </p:txBody>
+      </p:sp>
+      <p:pic>
+        <p:nvPicPr>
+          <p:cNvPr id="7" name="Picture 6">
+            <a:extLst>
+              <a:ext uri="{FF2B5EF4-FFF2-40B4-BE49-F238E27FC236}">
+                <a16:creationId xmlns:a16="http://schemas.microsoft.com/office/drawing/2014/main" id="{66B922AC-98E4-0750-D191-8DA96CA7CA05}"/>
+              </a:ext>
+            </a:extLst>
+          </p:cNvPr>
+          <p:cNvPicPr>
+            <a:picLocks noChangeAspect="1"/>
+          </p:cNvPicPr>
+          <p:nvPr/>
+        </p:nvPicPr>
+        <p:blipFill>
+          <a:blip r:embed="rId3"/>
+          <a:stretch>
+            <a:fillRect/>
+          </a:stretch>
+        </p:blipFill>
+        <p:spPr>
+          <a:xfrm>
+            <a:off x="156541" y="4678561"/>
+            <a:ext cx="8074514" cy="2487552"/>
+          </a:xfrm>
+          <a:prstGeom prst="rect">
+            <a:avLst/>
+          </a:prstGeom>
+        </p:spPr>
+      </p:pic>
     </p:spTree>
     <p:extLst>
       <p:ext uri="{BB962C8B-B14F-4D97-AF65-F5344CB8AC3E}">
@@ -4583,7 +5343,1904 @@
 </p:sld>
 </file>
 
-<file path=ppt/slides/slide4.xml><?xml version="1.0" encoding="utf-8"?>
+<file path=ppt/slides/slide5.xml><?xml version="1.0" encoding="utf-8"?>
+<p:sld xmlns:a="http://schemas.openxmlformats.org/drawingml/2006/main" xmlns:r="http://schemas.openxmlformats.org/officeDocument/2006/relationships" xmlns:p="http://schemas.openxmlformats.org/presentationml/2006/main">
+  <p:cSld>
+    <p:bg>
+      <p:bgPr>
+        <a:solidFill>
+          <a:schemeClr val="bg1"/>
+        </a:solidFill>
+        <a:effectLst/>
+      </p:bgPr>
+    </p:bg>
+    <p:spTree>
+      <p:nvGrpSpPr>
+        <p:cNvPr id="1" name=""/>
+        <p:cNvGrpSpPr/>
+        <p:nvPr/>
+      </p:nvGrpSpPr>
+      <p:grpSpPr>
+        <a:xfrm>
+          <a:off x="0" y="0"/>
+          <a:ext cx="0" cy="0"/>
+          <a:chOff x="0" y="0"/>
+          <a:chExt cx="0" cy="0"/>
+        </a:xfrm>
+      </p:grpSpPr>
+      <p:sp useBgFill="1">
+        <p:nvSpPr>
+          <p:cNvPr id="14" name="Rectangle 13">
+            <a:extLst>
+              <a:ext uri="{FF2B5EF4-FFF2-40B4-BE49-F238E27FC236}">
+                <a16:creationId xmlns:a16="http://schemas.microsoft.com/office/drawing/2014/main" id="{2EB492CD-616E-47F8-933B-5E2D952A0593}"/>
+              </a:ext>
+              <a:ext uri="{C183D7F6-B498-43B3-948B-1728B52AA6E4}">
+                <adec:decorative xmlns:adec="http://schemas.microsoft.com/office/drawing/2017/decorative" val="1"/>
+              </a:ext>
+            </a:extLst>
+          </p:cNvPr>
+          <p:cNvSpPr>
+            <a:spLocks noGrp="1" noRot="1" noChangeAspect="1" noMove="1" noResize="1" noEditPoints="1" noAdjustHandles="1" noChangeArrowheads="1" noChangeShapeType="1" noTextEdit="1"/>
+          </p:cNvSpPr>
+          <p:nvPr>
+            <p:extLst>
+              <p:ext uri="{386F3935-93C4-4BCD-93E2-E3B085C9AB24}">
+                <p16:designElem xmlns:p16="http://schemas.microsoft.com/office/powerpoint/2015/main" val="1"/>
+              </p:ext>
+            </p:extLst>
+          </p:nvPr>
+        </p:nvSpPr>
+        <p:spPr bwMode="white">
+          <a:xfrm>
+            <a:off x="0" y="0"/>
+            <a:ext cx="12192000" cy="6858000"/>
+          </a:xfrm>
+          <a:prstGeom prst="rect">
+            <a:avLst/>
+          </a:prstGeom>
+          <a:ln>
+            <a:noFill/>
+          </a:ln>
+        </p:spPr>
+        <p:style>
+          <a:lnRef idx="2">
+            <a:schemeClr val="accent1">
+              <a:shade val="50000"/>
+            </a:schemeClr>
+          </a:lnRef>
+          <a:fillRef idx="1">
+            <a:schemeClr val="accent1"/>
+          </a:fillRef>
+          <a:effectRef idx="0">
+            <a:schemeClr val="accent1"/>
+          </a:effectRef>
+          <a:fontRef idx="minor">
+            <a:schemeClr val="lt1"/>
+          </a:fontRef>
+        </p:style>
+        <p:txBody>
+          <a:bodyPr rtlCol="0" anchor="ctr"/>
+          <a:lstStyle>
+            <a:defPPr>
+              <a:defRPr lang="en-US"/>
+            </a:defPPr>
+            <a:lvl1pPr marL="0" algn="l" defTabSz="914400" rtl="0" eaLnBrk="1" latinLnBrk="0" hangingPunct="1">
+              <a:defRPr sz="1800" kern="1200">
+                <a:solidFill>
+                  <a:schemeClr val="lt1"/>
+                </a:solidFill>
+                <a:latin typeface="+mn-lt"/>
+                <a:ea typeface="+mn-ea"/>
+                <a:cs typeface="+mn-cs"/>
+              </a:defRPr>
+            </a:lvl1pPr>
+            <a:lvl2pPr marL="457200" algn="l" defTabSz="914400" rtl="0" eaLnBrk="1" latinLnBrk="0" hangingPunct="1">
+              <a:defRPr sz="1800" kern="1200">
+                <a:solidFill>
+                  <a:schemeClr val="lt1"/>
+                </a:solidFill>
+                <a:latin typeface="+mn-lt"/>
+                <a:ea typeface="+mn-ea"/>
+                <a:cs typeface="+mn-cs"/>
+              </a:defRPr>
+            </a:lvl2pPr>
+            <a:lvl3pPr marL="914400" algn="l" defTabSz="914400" rtl="0" eaLnBrk="1" latinLnBrk="0" hangingPunct="1">
+              <a:defRPr sz="1800" kern="1200">
+                <a:solidFill>
+                  <a:schemeClr val="lt1"/>
+                </a:solidFill>
+                <a:latin typeface="+mn-lt"/>
+                <a:ea typeface="+mn-ea"/>
+                <a:cs typeface="+mn-cs"/>
+              </a:defRPr>
+            </a:lvl3pPr>
+            <a:lvl4pPr marL="1371600" algn="l" defTabSz="914400" rtl="0" eaLnBrk="1" latinLnBrk="0" hangingPunct="1">
+              <a:defRPr sz="1800" kern="1200">
+                <a:solidFill>
+                  <a:schemeClr val="lt1"/>
+                </a:solidFill>
+                <a:latin typeface="+mn-lt"/>
+                <a:ea typeface="+mn-ea"/>
+                <a:cs typeface="+mn-cs"/>
+              </a:defRPr>
+            </a:lvl4pPr>
+            <a:lvl5pPr marL="1828800" algn="l" defTabSz="914400" rtl="0" eaLnBrk="1" latinLnBrk="0" hangingPunct="1">
+              <a:defRPr sz="1800" kern="1200">
+                <a:solidFill>
+                  <a:schemeClr val="lt1"/>
+                </a:solidFill>
+                <a:latin typeface="+mn-lt"/>
+                <a:ea typeface="+mn-ea"/>
+                <a:cs typeface="+mn-cs"/>
+              </a:defRPr>
+            </a:lvl5pPr>
+            <a:lvl6pPr marL="2286000" algn="l" defTabSz="914400" rtl="0" eaLnBrk="1" latinLnBrk="0" hangingPunct="1">
+              <a:defRPr sz="1800" kern="1200">
+                <a:solidFill>
+                  <a:schemeClr val="lt1"/>
+                </a:solidFill>
+                <a:latin typeface="+mn-lt"/>
+                <a:ea typeface="+mn-ea"/>
+                <a:cs typeface="+mn-cs"/>
+              </a:defRPr>
+            </a:lvl6pPr>
+            <a:lvl7pPr marL="2743200" algn="l" defTabSz="914400" rtl="0" eaLnBrk="1" latinLnBrk="0" hangingPunct="1">
+              <a:defRPr sz="1800" kern="1200">
+                <a:solidFill>
+                  <a:schemeClr val="lt1"/>
+                </a:solidFill>
+                <a:latin typeface="+mn-lt"/>
+                <a:ea typeface="+mn-ea"/>
+                <a:cs typeface="+mn-cs"/>
+              </a:defRPr>
+            </a:lvl7pPr>
+            <a:lvl8pPr marL="3200400" algn="l" defTabSz="914400" rtl="0" eaLnBrk="1" latinLnBrk="0" hangingPunct="1">
+              <a:defRPr sz="1800" kern="1200">
+                <a:solidFill>
+                  <a:schemeClr val="lt1"/>
+                </a:solidFill>
+                <a:latin typeface="+mn-lt"/>
+                <a:ea typeface="+mn-ea"/>
+                <a:cs typeface="+mn-cs"/>
+              </a:defRPr>
+            </a:lvl8pPr>
+            <a:lvl9pPr marL="3657600" algn="l" defTabSz="914400" rtl="0" eaLnBrk="1" latinLnBrk="0" hangingPunct="1">
+              <a:defRPr sz="1800" kern="1200">
+                <a:solidFill>
+                  <a:schemeClr val="lt1"/>
+                </a:solidFill>
+                <a:latin typeface="+mn-lt"/>
+                <a:ea typeface="+mn-ea"/>
+                <a:cs typeface="+mn-cs"/>
+              </a:defRPr>
+            </a:lvl9pPr>
+          </a:lstStyle>
+          <a:p>
+            <a:pPr algn="ctr"/>
+            <a:endParaRPr lang="en-US"/>
+          </a:p>
+        </p:txBody>
+      </p:sp>
+      <p:sp>
+        <p:nvSpPr>
+          <p:cNvPr id="15" name="Arc 14">
+            <a:extLst>
+              <a:ext uri="{FF2B5EF4-FFF2-40B4-BE49-F238E27FC236}">
+                <a16:creationId xmlns:a16="http://schemas.microsoft.com/office/drawing/2014/main" id="{59383CF9-23B5-4335-9B21-1791C4CF1C75}"/>
+              </a:ext>
+              <a:ext uri="{C183D7F6-B498-43B3-948B-1728B52AA6E4}">
+                <adec:decorative xmlns:adec="http://schemas.microsoft.com/office/drawing/2017/decorative" val="1"/>
+              </a:ext>
+            </a:extLst>
+          </p:cNvPr>
+          <p:cNvSpPr>
+            <a:spLocks noGrp="1" noRot="1" noChangeAspect="1" noMove="1" noResize="1" noEditPoints="1" noAdjustHandles="1" noChangeArrowheads="1" noChangeShapeType="1" noTextEdit="1"/>
+          </p:cNvSpPr>
+          <p:nvPr>
+            <p:extLst>
+              <p:ext uri="{386F3935-93C4-4BCD-93E2-E3B085C9AB24}">
+                <p16:designElem xmlns:p16="http://schemas.microsoft.com/office/powerpoint/2015/main" val="1"/>
+              </p:ext>
+            </p:extLst>
+          </p:nvPr>
+        </p:nvSpPr>
+        <p:spPr>
+          <a:xfrm rot="3967198" flipH="1">
+            <a:off x="8631348" y="490493"/>
+            <a:ext cx="2987899" cy="2987899"/>
+          </a:xfrm>
+          <a:prstGeom prst="arc">
+            <a:avLst>
+              <a:gd name="adj1" fmla="val 14441841"/>
+              <a:gd name="adj2" fmla="val 0"/>
+            </a:avLst>
+          </a:prstGeom>
+          <a:ln w="127000" cap="rnd">
+            <a:solidFill>
+              <a:schemeClr val="accent4"/>
+            </a:solidFill>
+            <a:prstDash val="dash"/>
+            <a:miter lim="800000"/>
+          </a:ln>
+        </p:spPr>
+        <p:style>
+          <a:lnRef idx="1">
+            <a:schemeClr val="accent1"/>
+          </a:lnRef>
+          <a:fillRef idx="0">
+            <a:schemeClr val="accent1"/>
+          </a:fillRef>
+          <a:effectRef idx="0">
+            <a:schemeClr val="accent1"/>
+          </a:effectRef>
+          <a:fontRef idx="minor">
+            <a:schemeClr val="tx1"/>
+          </a:fontRef>
+        </p:style>
+        <p:txBody>
+          <a:bodyPr rtlCol="0" anchor="ctr"/>
+          <a:lstStyle/>
+          <a:p>
+            <a:pPr marL="0" marR="0" lvl="0" indent="0" algn="ctr" defTabSz="914400" rtl="0" eaLnBrk="1" fontAlgn="auto" latinLnBrk="0" hangingPunct="1">
+              <a:lnSpc>
+                <a:spcPct val="100000"/>
+              </a:lnSpc>
+              <a:spcBef>
+                <a:spcPts val="0"/>
+              </a:spcBef>
+              <a:spcAft>
+                <a:spcPts val="0"/>
+              </a:spcAft>
+              <a:buClrTx/>
+              <a:buSzTx/>
+              <a:buFontTx/>
+              <a:buNone/>
+              <a:tabLst/>
+              <a:defRPr/>
+            </a:pPr>
+            <a:endParaRPr kumimoji="0" lang="en-US" sz="1800" b="0" i="0" u="none" strike="noStrike" kern="1200" cap="none" spc="0" normalizeH="0" baseline="0" noProof="0">
+              <a:ln>
+                <a:noFill/>
+              </a:ln>
+              <a:solidFill>
+                <a:srgbClr val="000000"/>
+              </a:solidFill>
+              <a:effectLst/>
+              <a:uLnTx/>
+              <a:uFillTx/>
+              <a:latin typeface="Calibri" panose="020F0502020204030204"/>
+              <a:ea typeface="+mn-ea"/>
+              <a:cs typeface="+mn-cs"/>
+            </a:endParaRPr>
+          </a:p>
+        </p:txBody>
+      </p:sp>
+      <p:sp>
+        <p:nvSpPr>
+          <p:cNvPr id="2" name="Title 1">
+            <a:extLst>
+              <a:ext uri="{FF2B5EF4-FFF2-40B4-BE49-F238E27FC236}">
+                <a16:creationId xmlns:a16="http://schemas.microsoft.com/office/drawing/2014/main" id="{28266B10-05C4-91E7-87CD-A0B8F2A703DE}"/>
+              </a:ext>
+            </a:extLst>
+          </p:cNvPr>
+          <p:cNvSpPr>
+            <a:spLocks noGrp="1"/>
+          </p:cNvSpPr>
+          <p:nvPr>
+            <p:ph type="title"/>
+          </p:nvPr>
+        </p:nvSpPr>
+        <p:spPr>
+          <a:xfrm>
+            <a:off x="5894962" y="479493"/>
+            <a:ext cx="5458838" cy="1325563"/>
+          </a:xfrm>
+        </p:spPr>
+        <p:txBody>
+          <a:bodyPr vert="horz" lIns="91440" tIns="45720" rIns="91440" bIns="45720" rtlCol="0" anchor="ctr">
+            <a:normAutofit/>
+          </a:bodyPr>
+          <a:lstStyle/>
+          <a:p>
+            <a:r>
+              <a:rPr lang="en-US" kern="1200">
+                <a:solidFill>
+                  <a:schemeClr val="tx1"/>
+                </a:solidFill>
+                <a:latin typeface="+mj-lt"/>
+                <a:ea typeface="+mj-ea"/>
+                <a:cs typeface="+mj-cs"/>
+              </a:rPr>
+              <a:t>Overview</a:t>
+            </a:r>
+          </a:p>
+        </p:txBody>
+      </p:sp>
+      <p:sp>
+        <p:nvSpPr>
+          <p:cNvPr id="13" name="Freeform: Shape 12">
+            <a:extLst>
+              <a:ext uri="{FF2B5EF4-FFF2-40B4-BE49-F238E27FC236}">
+                <a16:creationId xmlns:a16="http://schemas.microsoft.com/office/drawing/2014/main" id="{0007FE00-9498-4706-B255-6437B0252C02}"/>
+              </a:ext>
+              <a:ext uri="{C183D7F6-B498-43B3-948B-1728B52AA6E4}">
+                <adec:decorative xmlns:adec="http://schemas.microsoft.com/office/drawing/2017/decorative" val="1"/>
+              </a:ext>
+            </a:extLst>
+          </p:cNvPr>
+          <p:cNvSpPr>
+            <a:spLocks noGrp="1" noRot="1" noChangeAspect="1" noMove="1" noResize="1" noEditPoints="1" noAdjustHandles="1" noChangeArrowheads="1" noChangeShapeType="1" noTextEdit="1"/>
+          </p:cNvSpPr>
+          <p:nvPr>
+            <p:extLst>
+              <p:ext uri="{386F3935-93C4-4BCD-93E2-E3B085C9AB24}">
+                <p16:designElem xmlns:p16="http://schemas.microsoft.com/office/powerpoint/2015/main" val="1"/>
+              </p:ext>
+            </p:extLst>
+          </p:nvPr>
+        </p:nvSpPr>
+        <p:spPr>
+          <a:xfrm flipH="1">
+            <a:off x="0" y="5486400"/>
+            <a:ext cx="2672863" cy="1371600"/>
+          </a:xfrm>
+          <a:custGeom>
+            <a:avLst/>
+            <a:gdLst>
+              <a:gd name="connsiteX0" fmla="*/ 1721734 w 2672863"/>
+              <a:gd name="connsiteY0" fmla="*/ 0 h 1371600"/>
+              <a:gd name="connsiteX1" fmla="*/ 2564444 w 2672863"/>
+              <a:gd name="connsiteY1" fmla="*/ 213382 h 1371600"/>
+              <a:gd name="connsiteX2" fmla="*/ 2672863 w 2672863"/>
+              <a:gd name="connsiteY2" fmla="*/ 279248 h 1371600"/>
+              <a:gd name="connsiteX3" fmla="*/ 2672863 w 2672863"/>
+              <a:gd name="connsiteY3" fmla="*/ 1371600 h 1371600"/>
+              <a:gd name="connsiteX4" fmla="*/ 0 w 2672863"/>
+              <a:gd name="connsiteY4" fmla="*/ 1371600 h 1371600"/>
+              <a:gd name="connsiteX5" fmla="*/ 33268 w 2672863"/>
+              <a:gd name="connsiteY5" fmla="*/ 1242216 h 1371600"/>
+              <a:gd name="connsiteX6" fmla="*/ 1721734 w 2672863"/>
+              <a:gd name="connsiteY6" fmla="*/ 0 h 1371600"/>
+            </a:gdLst>
+            <a:ahLst/>
+            <a:cxnLst>
+              <a:cxn ang="0">
+                <a:pos x="connsiteX0" y="connsiteY0"/>
+              </a:cxn>
+              <a:cxn ang="0">
+                <a:pos x="connsiteX1" y="connsiteY1"/>
+              </a:cxn>
+              <a:cxn ang="0">
+                <a:pos x="connsiteX2" y="connsiteY2"/>
+              </a:cxn>
+              <a:cxn ang="0">
+                <a:pos x="connsiteX3" y="connsiteY3"/>
+              </a:cxn>
+              <a:cxn ang="0">
+                <a:pos x="connsiteX4" y="connsiteY4"/>
+              </a:cxn>
+              <a:cxn ang="0">
+                <a:pos x="connsiteX5" y="connsiteY5"/>
+              </a:cxn>
+              <a:cxn ang="0">
+                <a:pos x="connsiteX6" y="connsiteY6"/>
+              </a:cxn>
+            </a:cxnLst>
+            <a:rect l="l" t="t" r="r" b="b"/>
+            <a:pathLst>
+              <a:path w="2672863" h="1371600">
+                <a:moveTo>
+                  <a:pt x="1721734" y="0"/>
+                </a:moveTo>
+                <a:cubicBezTo>
+                  <a:pt x="2026863" y="0"/>
+                  <a:pt x="2313937" y="77299"/>
+                  <a:pt x="2564444" y="213382"/>
+                </a:cubicBezTo>
+                <a:lnTo>
+                  <a:pt x="2672863" y="279248"/>
+                </a:lnTo>
+                <a:lnTo>
+                  <a:pt x="2672863" y="1371600"/>
+                </a:lnTo>
+                <a:lnTo>
+                  <a:pt x="0" y="1371600"/>
+                </a:lnTo>
+                <a:lnTo>
+                  <a:pt x="33268" y="1242216"/>
+                </a:lnTo>
+                <a:cubicBezTo>
+                  <a:pt x="257110" y="522539"/>
+                  <a:pt x="928399" y="0"/>
+                  <a:pt x="1721734" y="0"/>
+                </a:cubicBezTo>
+                <a:close/>
+              </a:path>
+            </a:pathLst>
+          </a:custGeom>
+          <a:solidFill>
+            <a:schemeClr val="accent4"/>
+          </a:solidFill>
+          <a:ln>
+            <a:noFill/>
+          </a:ln>
+        </p:spPr>
+        <p:style>
+          <a:lnRef idx="2">
+            <a:schemeClr val="accent1">
+              <a:shade val="50000"/>
+            </a:schemeClr>
+          </a:lnRef>
+          <a:fillRef idx="1">
+            <a:schemeClr val="accent1"/>
+          </a:fillRef>
+          <a:effectRef idx="0">
+            <a:schemeClr val="accent1"/>
+          </a:effectRef>
+          <a:fontRef idx="minor">
+            <a:schemeClr val="lt1"/>
+          </a:fontRef>
+        </p:style>
+        <p:txBody>
+          <a:bodyPr wrap="square" rtlCol="0" anchor="ctr">
+            <a:noAutofit/>
+          </a:bodyPr>
+          <a:lstStyle/>
+          <a:p>
+            <a:pPr algn="ctr"/>
+            <a:endParaRPr lang="en-US"/>
+          </a:p>
+        </p:txBody>
+      </p:sp>
+      <p:sp>
+        <p:nvSpPr>
+          <p:cNvPr id="3" name="TextBox 2">
+            <a:extLst>
+              <a:ext uri="{FF2B5EF4-FFF2-40B4-BE49-F238E27FC236}">
+                <a16:creationId xmlns:a16="http://schemas.microsoft.com/office/drawing/2014/main" id="{158B7440-D8D5-F8B9-C859-C3F8DF963896}"/>
+              </a:ext>
+            </a:extLst>
+          </p:cNvPr>
+          <p:cNvSpPr txBox="1"/>
+          <p:nvPr/>
+        </p:nvSpPr>
+        <p:spPr>
+          <a:xfrm>
+            <a:off x="5894962" y="1984443"/>
+            <a:ext cx="5458838" cy="4192520"/>
+          </a:xfrm>
+          <a:prstGeom prst="rect">
+            <a:avLst/>
+          </a:prstGeom>
+        </p:spPr>
+        <p:txBody>
+          <a:bodyPr vert="horz" lIns="91440" tIns="45720" rIns="91440" bIns="45720" rtlCol="0">
+            <a:normAutofit lnSpcReduction="10000"/>
+          </a:bodyPr>
+          <a:lstStyle/>
+          <a:p>
+            <a:pPr>
+              <a:lnSpc>
+                <a:spcPct val="90000"/>
+              </a:lnSpc>
+              <a:spcAft>
+                <a:spcPts val="600"/>
+              </a:spcAft>
+            </a:pPr>
+            <a:r>
+              <a:rPr lang="en-US" b="1" dirty="0"/>
+              <a:t>2. Product Functions</a:t>
+            </a:r>
+            <a:r>
+              <a:rPr lang="en-US" dirty="0"/>
+              <a:t>:  Study Circles, Direct Messaging, User Profiles, Note Sharing &amp; Requesting, Calendar &amp; Assignment Tracking, Pomodoro Timer, and Interactive Study Tools.</a:t>
+            </a:r>
+          </a:p>
+          <a:p>
+            <a:pPr indent="-228600">
+              <a:lnSpc>
+                <a:spcPct val="90000"/>
+              </a:lnSpc>
+              <a:spcAft>
+                <a:spcPts val="600"/>
+              </a:spcAft>
+              <a:buFont typeface="Arial" panose="020B0604020202020204" pitchFamily="34" charset="0"/>
+              <a:buChar char="•"/>
+            </a:pPr>
+            <a:endParaRPr lang="en-US" dirty="0"/>
+          </a:p>
+          <a:p>
+            <a:pPr>
+              <a:lnSpc>
+                <a:spcPct val="90000"/>
+              </a:lnSpc>
+              <a:spcAft>
+                <a:spcPts val="600"/>
+              </a:spcAft>
+            </a:pPr>
+            <a:r>
+              <a:rPr lang="en-US" b="1" dirty="0"/>
+              <a:t>3. User Classes and Characteristics</a:t>
+            </a:r>
+            <a:r>
+              <a:rPr lang="en-US" dirty="0"/>
+              <a:t>: Depicted on the left</a:t>
+            </a:r>
+          </a:p>
+          <a:p>
+            <a:pPr>
+              <a:lnSpc>
+                <a:spcPct val="90000"/>
+              </a:lnSpc>
+              <a:spcAft>
+                <a:spcPts val="600"/>
+              </a:spcAft>
+            </a:pPr>
+            <a:endParaRPr lang="en-US" dirty="0"/>
+          </a:p>
+          <a:p>
+            <a:pPr>
+              <a:lnSpc>
+                <a:spcPct val="90000"/>
+              </a:lnSpc>
+              <a:spcAft>
+                <a:spcPts val="600"/>
+              </a:spcAft>
+            </a:pPr>
+            <a:r>
+              <a:rPr lang="en-US" b="1" dirty="0"/>
+              <a:t>4. Operating Environment</a:t>
+            </a:r>
+            <a:r>
+              <a:rPr lang="en-US" dirty="0"/>
+              <a:t>: Supporting Environments include:</a:t>
+            </a:r>
+          </a:p>
+          <a:p>
+            <a:pPr lvl="0"/>
+            <a:r>
+              <a:rPr lang="en-US" sz="1400" b="1" dirty="0"/>
+              <a:t>Operating Systems:</a:t>
+            </a:r>
+            <a:r>
+              <a:rPr lang="en-US" sz="1400" dirty="0"/>
+              <a:t> Windows 10+, macOS 12+, Linux (Ubuntu 20.04+)</a:t>
+            </a:r>
+          </a:p>
+          <a:p>
+            <a:pPr lvl="0"/>
+            <a:r>
+              <a:rPr lang="en-US" sz="1400" b="1" dirty="0"/>
+              <a:t>Browsers:</a:t>
+            </a:r>
+            <a:r>
+              <a:rPr lang="en-US" sz="1400" dirty="0"/>
+              <a:t> Chrome (v110+), Edge (v110+), Firefox (v100+), Safari (v15+)</a:t>
+            </a:r>
+          </a:p>
+          <a:p>
+            <a:pPr lvl="0"/>
+            <a:r>
+              <a:rPr lang="en-US" sz="1400" b="1" dirty="0"/>
+              <a:t>Internet Connection:</a:t>
+            </a:r>
+            <a:r>
+              <a:rPr lang="en-US" sz="1400" dirty="0"/>
+              <a:t> Required for messaging, data storage, and collaboration.</a:t>
+            </a:r>
+          </a:p>
+          <a:p>
+            <a:pPr>
+              <a:lnSpc>
+                <a:spcPct val="90000"/>
+              </a:lnSpc>
+              <a:spcAft>
+                <a:spcPts val="600"/>
+              </a:spcAft>
+            </a:pPr>
+            <a:endParaRPr lang="en-US" dirty="0"/>
+          </a:p>
+          <a:p>
+            <a:pPr>
+              <a:lnSpc>
+                <a:spcPct val="90000"/>
+              </a:lnSpc>
+              <a:spcAft>
+                <a:spcPts val="600"/>
+              </a:spcAft>
+            </a:pPr>
+            <a:endParaRPr lang="en-US" b="1" dirty="0"/>
+          </a:p>
+          <a:p>
+            <a:pPr indent="-228600">
+              <a:lnSpc>
+                <a:spcPct val="90000"/>
+              </a:lnSpc>
+              <a:spcAft>
+                <a:spcPts val="600"/>
+              </a:spcAft>
+              <a:buFont typeface="Arial" panose="020B0604020202020204" pitchFamily="34" charset="0"/>
+              <a:buChar char="•"/>
+            </a:pPr>
+            <a:endParaRPr lang="en-US" b="1" dirty="0"/>
+          </a:p>
+          <a:p>
+            <a:pPr indent="-228600">
+              <a:lnSpc>
+                <a:spcPct val="90000"/>
+              </a:lnSpc>
+              <a:spcAft>
+                <a:spcPts val="600"/>
+              </a:spcAft>
+              <a:buFont typeface="Arial" panose="020B0604020202020204" pitchFamily="34" charset="0"/>
+              <a:buChar char="•"/>
+            </a:pPr>
+            <a:endParaRPr lang="en-US" b="1" dirty="0"/>
+          </a:p>
+        </p:txBody>
+      </p:sp>
+      <p:graphicFrame>
+        <p:nvGraphicFramePr>
+          <p:cNvPr id="4" name="Table 3">
+            <a:extLst>
+              <a:ext uri="{FF2B5EF4-FFF2-40B4-BE49-F238E27FC236}">
+                <a16:creationId xmlns:a16="http://schemas.microsoft.com/office/drawing/2014/main" id="{69BC4DB0-04E7-FE90-13C3-8988BA32C186}"/>
+              </a:ext>
+            </a:extLst>
+          </p:cNvPr>
+          <p:cNvGraphicFramePr>
+            <a:graphicFrameLocks noGrp="1"/>
+          </p:cNvGraphicFramePr>
+          <p:nvPr>
+            <p:extLst>
+              <p:ext uri="{D42A27DB-BD31-4B8C-83A1-F6EECF244321}">
+                <p14:modId xmlns:p14="http://schemas.microsoft.com/office/powerpoint/2010/main" val="3141556323"/>
+              </p:ext>
+            </p:extLst>
+          </p:nvPr>
+        </p:nvGraphicFramePr>
+        <p:xfrm>
+          <a:off x="95857" y="2388564"/>
+          <a:ext cx="4777383" cy="1152303"/>
+        </p:xfrm>
+        <a:graphic>
+          <a:graphicData uri="http://schemas.openxmlformats.org/drawingml/2006/table">
+            <a:tbl>
+              <a:tblPr firstRow="1" firstCol="1" bandRow="1"/>
+              <a:tblGrid>
+                <a:gridCol w="1069056">
+                  <a:extLst>
+                    <a:ext uri="{9D8B030D-6E8A-4147-A177-3AD203B41FA5}">
+                      <a16:colId xmlns:a16="http://schemas.microsoft.com/office/drawing/2014/main" val="650291121"/>
+                    </a:ext>
+                  </a:extLst>
+                </a:gridCol>
+                <a:gridCol w="2327499">
+                  <a:extLst>
+                    <a:ext uri="{9D8B030D-6E8A-4147-A177-3AD203B41FA5}">
+                      <a16:colId xmlns:a16="http://schemas.microsoft.com/office/drawing/2014/main" val="3048312930"/>
+                    </a:ext>
+                  </a:extLst>
+                </a:gridCol>
+                <a:gridCol w="664802">
+                  <a:extLst>
+                    <a:ext uri="{9D8B030D-6E8A-4147-A177-3AD203B41FA5}">
+                      <a16:colId xmlns:a16="http://schemas.microsoft.com/office/drawing/2014/main" val="2569473128"/>
+                    </a:ext>
+                  </a:extLst>
+                </a:gridCol>
+                <a:gridCol w="716026">
+                  <a:extLst>
+                    <a:ext uri="{9D8B030D-6E8A-4147-A177-3AD203B41FA5}">
+                      <a16:colId xmlns:a16="http://schemas.microsoft.com/office/drawing/2014/main" val="2408838475"/>
+                    </a:ext>
+                  </a:extLst>
+                </a:gridCol>
+              </a:tblGrid>
+              <a:tr h="0">
+                <a:tc>
+                  <a:txBody>
+                    <a:bodyPr/>
+                    <a:lstStyle/>
+                    <a:p>
+                      <a:pPr marL="0" marR="0" algn="ctr" fontAlgn="ctr">
+                        <a:lnSpc>
+                          <a:spcPts val="1200"/>
+                        </a:lnSpc>
+                        <a:buNone/>
+                      </a:pPr>
+                      <a:r>
+                        <a:rPr lang="en-US" sz="1000" b="1" i="0" u="none" strike="noStrike" dirty="0">
+                          <a:effectLst/>
+                          <a:latin typeface="Times New Roman" panose="02020603050405020304" pitchFamily="18" charset="0"/>
+                          <a:ea typeface="Times New Roman" panose="02020603050405020304" pitchFamily="18" charset="0"/>
+                          <a:cs typeface="Times New Roman" panose="02020603050405020304" pitchFamily="18" charset="0"/>
+                        </a:rPr>
+                        <a:t>User Class</a:t>
+                      </a:r>
+                      <a:endParaRPr lang="en-US" sz="1600" b="0" i="0" u="none" strike="noStrike" dirty="0">
+                        <a:effectLst/>
+                        <a:latin typeface="Arial" panose="020B0604020202020204" pitchFamily="34" charset="0"/>
+                      </a:endParaRPr>
+                    </a:p>
+                  </a:txBody>
+                  <a:tcPr marL="8307" marR="8307" marT="8307" marB="8307" anchor="ctr">
+                    <a:lnL>
+                      <a:noFill/>
+                    </a:lnL>
+                    <a:lnR>
+                      <a:noFill/>
+                    </a:lnR>
+                    <a:lnT>
+                      <a:noFill/>
+                    </a:lnT>
+                    <a:lnB>
+                      <a:noFill/>
+                    </a:lnB>
+                    <a:noFill/>
+                  </a:tcPr>
+                </a:tc>
+                <a:tc>
+                  <a:txBody>
+                    <a:bodyPr/>
+                    <a:lstStyle/>
+                    <a:p>
+                      <a:pPr marL="0" marR="0" algn="ctr" fontAlgn="ctr">
+                        <a:lnSpc>
+                          <a:spcPts val="1200"/>
+                        </a:lnSpc>
+                        <a:buNone/>
+                      </a:pPr>
+                      <a:r>
+                        <a:rPr lang="en-US" sz="1000" b="1" i="0" u="none" strike="noStrike">
+                          <a:effectLst/>
+                          <a:latin typeface="Times New Roman" panose="02020603050405020304" pitchFamily="18" charset="0"/>
+                          <a:ea typeface="Times New Roman" panose="02020603050405020304" pitchFamily="18" charset="0"/>
+                          <a:cs typeface="Times New Roman" panose="02020603050405020304" pitchFamily="18" charset="0"/>
+                        </a:rPr>
+                        <a:t>Description</a:t>
+                      </a:r>
+                      <a:endParaRPr lang="en-US" sz="1600" b="0" i="0" u="none" strike="noStrike">
+                        <a:effectLst/>
+                        <a:latin typeface="Arial" panose="020B0604020202020204" pitchFamily="34" charset="0"/>
+                      </a:endParaRPr>
+                    </a:p>
+                  </a:txBody>
+                  <a:tcPr marL="8307" marR="8307" marT="8307" marB="8307" anchor="ctr">
+                    <a:lnL>
+                      <a:noFill/>
+                    </a:lnL>
+                    <a:lnR>
+                      <a:noFill/>
+                    </a:lnR>
+                    <a:lnT>
+                      <a:noFill/>
+                    </a:lnT>
+                    <a:lnB>
+                      <a:noFill/>
+                    </a:lnB>
+                    <a:noFill/>
+                  </a:tcPr>
+                </a:tc>
+                <a:tc>
+                  <a:txBody>
+                    <a:bodyPr/>
+                    <a:lstStyle/>
+                    <a:p>
+                      <a:pPr marL="0" marR="0" algn="ctr" fontAlgn="ctr">
+                        <a:lnSpc>
+                          <a:spcPts val="1200"/>
+                        </a:lnSpc>
+                        <a:buNone/>
+                      </a:pPr>
+                      <a:r>
+                        <a:rPr lang="en-US" sz="1000" b="1" i="0" u="none" strike="noStrike">
+                          <a:effectLst/>
+                          <a:latin typeface="Times New Roman" panose="02020603050405020304" pitchFamily="18" charset="0"/>
+                          <a:ea typeface="Times New Roman" panose="02020603050405020304" pitchFamily="18" charset="0"/>
+                          <a:cs typeface="Times New Roman" panose="02020603050405020304" pitchFamily="18" charset="0"/>
+                        </a:rPr>
+                        <a:t>Technical Expertise</a:t>
+                      </a:r>
+                      <a:endParaRPr lang="en-US" sz="1600" b="0" i="0" u="none" strike="noStrike">
+                        <a:effectLst/>
+                        <a:latin typeface="Arial" panose="020B0604020202020204" pitchFamily="34" charset="0"/>
+                      </a:endParaRPr>
+                    </a:p>
+                  </a:txBody>
+                  <a:tcPr marL="8307" marR="8307" marT="8307" marB="8307" anchor="ctr">
+                    <a:lnL>
+                      <a:noFill/>
+                    </a:lnL>
+                    <a:lnR>
+                      <a:noFill/>
+                    </a:lnR>
+                    <a:lnT>
+                      <a:noFill/>
+                    </a:lnT>
+                    <a:lnB>
+                      <a:noFill/>
+                    </a:lnB>
+                    <a:noFill/>
+                  </a:tcPr>
+                </a:tc>
+                <a:tc>
+                  <a:txBody>
+                    <a:bodyPr/>
+                    <a:lstStyle/>
+                    <a:p>
+                      <a:pPr marL="0" marR="0" algn="ctr" fontAlgn="ctr">
+                        <a:lnSpc>
+                          <a:spcPts val="1200"/>
+                        </a:lnSpc>
+                        <a:buNone/>
+                      </a:pPr>
+                      <a:r>
+                        <a:rPr lang="en-US" sz="1000" b="1" i="0" u="none" strike="noStrike">
+                          <a:effectLst/>
+                          <a:latin typeface="Times New Roman" panose="02020603050405020304" pitchFamily="18" charset="0"/>
+                          <a:ea typeface="Times New Roman" panose="02020603050405020304" pitchFamily="18" charset="0"/>
+                          <a:cs typeface="Times New Roman" panose="02020603050405020304" pitchFamily="18" charset="0"/>
+                        </a:rPr>
+                        <a:t>Frequency of Use</a:t>
+                      </a:r>
+                      <a:endParaRPr lang="en-US" sz="1600" b="0" i="0" u="none" strike="noStrike">
+                        <a:effectLst/>
+                        <a:latin typeface="Arial" panose="020B0604020202020204" pitchFamily="34" charset="0"/>
+                      </a:endParaRPr>
+                    </a:p>
+                  </a:txBody>
+                  <a:tcPr marL="8307" marR="8307" marT="8307" marB="8307" anchor="ctr">
+                    <a:lnL>
+                      <a:noFill/>
+                    </a:lnL>
+                    <a:lnR>
+                      <a:noFill/>
+                    </a:lnR>
+                    <a:lnT>
+                      <a:noFill/>
+                    </a:lnT>
+                    <a:lnB>
+                      <a:noFill/>
+                    </a:lnB>
+                    <a:noFill/>
+                  </a:tcPr>
+                </a:tc>
+                <a:extLst>
+                  <a:ext uri="{0D108BD9-81ED-4DB2-BD59-A6C34878D82A}">
+                    <a16:rowId xmlns:a16="http://schemas.microsoft.com/office/drawing/2014/main" val="1657638819"/>
+                  </a:ext>
+                </a:extLst>
+              </a:tr>
+              <a:tr h="320966">
+                <a:tc>
+                  <a:txBody>
+                    <a:bodyPr/>
+                    <a:lstStyle/>
+                    <a:p>
+                      <a:pPr marL="0" marR="0" algn="l" fontAlgn="ctr">
+                        <a:lnSpc>
+                          <a:spcPts val="1200"/>
+                        </a:lnSpc>
+                        <a:buNone/>
+                      </a:pPr>
+                      <a:r>
+                        <a:rPr lang="en-US" sz="1000" b="0" i="0" u="none" strike="noStrike">
+                          <a:effectLst/>
+                          <a:latin typeface="Times New Roman" panose="02020603050405020304" pitchFamily="18" charset="0"/>
+                          <a:ea typeface="Times New Roman" panose="02020603050405020304" pitchFamily="18" charset="0"/>
+                          <a:cs typeface="Times New Roman" panose="02020603050405020304" pitchFamily="18" charset="0"/>
+                        </a:rPr>
+                        <a:t>Students:</a:t>
+                      </a:r>
+                      <a:endParaRPr lang="en-US" sz="1600" b="0" i="0" u="none" strike="noStrike">
+                        <a:effectLst/>
+                        <a:latin typeface="Arial" panose="020B0604020202020204" pitchFamily="34" charset="0"/>
+                      </a:endParaRPr>
+                    </a:p>
+                  </a:txBody>
+                  <a:tcPr marL="8307" marR="8307" marT="8307" marB="8307" anchor="ctr">
+                    <a:lnL>
+                      <a:noFill/>
+                    </a:lnL>
+                    <a:lnR>
+                      <a:noFill/>
+                    </a:lnR>
+                    <a:lnT>
+                      <a:noFill/>
+                    </a:lnT>
+                    <a:lnB>
+                      <a:noFill/>
+                    </a:lnB>
+                    <a:noFill/>
+                  </a:tcPr>
+                </a:tc>
+                <a:tc>
+                  <a:txBody>
+                    <a:bodyPr/>
+                    <a:lstStyle/>
+                    <a:p>
+                      <a:pPr marL="0" marR="0" algn="l" fontAlgn="ctr">
+                        <a:lnSpc>
+                          <a:spcPts val="1200"/>
+                        </a:lnSpc>
+                        <a:buNone/>
+                      </a:pPr>
+                      <a:r>
+                        <a:rPr lang="en-US" sz="1000" b="0" i="0" u="none" strike="noStrike" dirty="0">
+                          <a:effectLst/>
+                          <a:latin typeface="Times New Roman" panose="02020603050405020304" pitchFamily="18" charset="0"/>
+                          <a:ea typeface="Times New Roman" panose="02020603050405020304" pitchFamily="18" charset="0"/>
+                          <a:cs typeface="Times New Roman" panose="02020603050405020304" pitchFamily="18" charset="0"/>
+                        </a:rPr>
+                        <a:t>Primary users who collaborate in study circles and track study progress.</a:t>
+                      </a:r>
+                      <a:endParaRPr lang="en-US" sz="1600" b="0" i="0" u="none" strike="noStrike" dirty="0">
+                        <a:effectLst/>
+                        <a:latin typeface="Arial" panose="020B0604020202020204" pitchFamily="34" charset="0"/>
+                      </a:endParaRPr>
+                    </a:p>
+                  </a:txBody>
+                  <a:tcPr marL="8307" marR="8307" marT="8307" marB="8307" anchor="ctr">
+                    <a:lnL>
+                      <a:noFill/>
+                    </a:lnL>
+                    <a:lnR>
+                      <a:noFill/>
+                    </a:lnR>
+                    <a:lnT>
+                      <a:noFill/>
+                    </a:lnT>
+                    <a:lnB>
+                      <a:noFill/>
+                    </a:lnB>
+                    <a:noFill/>
+                  </a:tcPr>
+                </a:tc>
+                <a:tc>
+                  <a:txBody>
+                    <a:bodyPr/>
+                    <a:lstStyle/>
+                    <a:p>
+                      <a:pPr marL="0" marR="0" algn="l" fontAlgn="ctr">
+                        <a:lnSpc>
+                          <a:spcPts val="1200"/>
+                        </a:lnSpc>
+                        <a:buNone/>
+                      </a:pPr>
+                      <a:r>
+                        <a:rPr lang="en-US" sz="1000" b="0" i="0" u="none" strike="noStrike">
+                          <a:effectLst/>
+                          <a:latin typeface="Times New Roman" panose="02020603050405020304" pitchFamily="18" charset="0"/>
+                          <a:ea typeface="Times New Roman" panose="02020603050405020304" pitchFamily="18" charset="0"/>
+                          <a:cs typeface="Times New Roman" panose="02020603050405020304" pitchFamily="18" charset="0"/>
+                        </a:rPr>
+                        <a:t>Basic–Moderate</a:t>
+                      </a:r>
+                      <a:endParaRPr lang="en-US" sz="1600" b="0" i="0" u="none" strike="noStrike">
+                        <a:effectLst/>
+                        <a:latin typeface="Arial" panose="020B0604020202020204" pitchFamily="34" charset="0"/>
+                      </a:endParaRPr>
+                    </a:p>
+                  </a:txBody>
+                  <a:tcPr marL="8307" marR="8307" marT="8307" marB="8307" anchor="ctr">
+                    <a:lnL>
+                      <a:noFill/>
+                    </a:lnL>
+                    <a:lnR>
+                      <a:noFill/>
+                    </a:lnR>
+                    <a:lnT>
+                      <a:noFill/>
+                    </a:lnT>
+                    <a:lnB>
+                      <a:noFill/>
+                    </a:lnB>
+                    <a:noFill/>
+                  </a:tcPr>
+                </a:tc>
+                <a:tc>
+                  <a:txBody>
+                    <a:bodyPr/>
+                    <a:lstStyle/>
+                    <a:p>
+                      <a:pPr marL="0" marR="0" algn="l" fontAlgn="ctr">
+                        <a:lnSpc>
+                          <a:spcPts val="1200"/>
+                        </a:lnSpc>
+                        <a:buNone/>
+                      </a:pPr>
+                      <a:r>
+                        <a:rPr lang="en-US" sz="1000" b="0" i="0" u="none" strike="noStrike">
+                          <a:effectLst/>
+                          <a:latin typeface="Times New Roman" panose="02020603050405020304" pitchFamily="18" charset="0"/>
+                          <a:ea typeface="Times New Roman" panose="02020603050405020304" pitchFamily="18" charset="0"/>
+                          <a:cs typeface="Times New Roman" panose="02020603050405020304" pitchFamily="18" charset="0"/>
+                        </a:rPr>
+                        <a:t>Daily</a:t>
+                      </a:r>
+                      <a:endParaRPr lang="en-US" sz="1600" b="0" i="0" u="none" strike="noStrike">
+                        <a:effectLst/>
+                        <a:latin typeface="Arial" panose="020B0604020202020204" pitchFamily="34" charset="0"/>
+                      </a:endParaRPr>
+                    </a:p>
+                  </a:txBody>
+                  <a:tcPr marL="8307" marR="8307" marT="8307" marB="8307" anchor="ctr">
+                    <a:lnL>
+                      <a:noFill/>
+                    </a:lnL>
+                    <a:lnR>
+                      <a:noFill/>
+                    </a:lnR>
+                    <a:lnT>
+                      <a:noFill/>
+                    </a:lnT>
+                    <a:lnB>
+                      <a:noFill/>
+                    </a:lnB>
+                    <a:noFill/>
+                  </a:tcPr>
+                </a:tc>
+                <a:extLst>
+                  <a:ext uri="{0D108BD9-81ED-4DB2-BD59-A6C34878D82A}">
+                    <a16:rowId xmlns:a16="http://schemas.microsoft.com/office/drawing/2014/main" val="4266940528"/>
+                  </a:ext>
+                </a:extLst>
+              </a:tr>
+              <a:tr h="188061">
+                <a:tc>
+                  <a:txBody>
+                    <a:bodyPr/>
+                    <a:lstStyle/>
+                    <a:p>
+                      <a:pPr marL="0" marR="0" algn="l" fontAlgn="ctr">
+                        <a:lnSpc>
+                          <a:spcPts val="1200"/>
+                        </a:lnSpc>
+                        <a:buNone/>
+                      </a:pPr>
+                      <a:r>
+                        <a:rPr lang="en-US" sz="1000" b="0" i="0" u="none" strike="noStrike">
+                          <a:effectLst/>
+                          <a:latin typeface="Times New Roman" panose="02020603050405020304" pitchFamily="18" charset="0"/>
+                          <a:ea typeface="Times New Roman" panose="02020603050405020304" pitchFamily="18" charset="0"/>
+                          <a:cs typeface="Times New Roman" panose="02020603050405020304" pitchFamily="18" charset="0"/>
+                        </a:rPr>
+                        <a:t>Educators/Tutors:</a:t>
+                      </a:r>
+                      <a:endParaRPr lang="en-US" sz="1600" b="0" i="0" u="none" strike="noStrike">
+                        <a:effectLst/>
+                        <a:latin typeface="Arial" panose="020B0604020202020204" pitchFamily="34" charset="0"/>
+                      </a:endParaRPr>
+                    </a:p>
+                  </a:txBody>
+                  <a:tcPr marL="8307" marR="8307" marT="8307" marB="8307" anchor="ctr">
+                    <a:lnL>
+                      <a:noFill/>
+                    </a:lnL>
+                    <a:lnR>
+                      <a:noFill/>
+                    </a:lnR>
+                    <a:lnT>
+                      <a:noFill/>
+                    </a:lnT>
+                    <a:lnB>
+                      <a:noFill/>
+                    </a:lnB>
+                    <a:noFill/>
+                  </a:tcPr>
+                </a:tc>
+                <a:tc>
+                  <a:txBody>
+                    <a:bodyPr/>
+                    <a:lstStyle/>
+                    <a:p>
+                      <a:pPr marL="0" marR="0" algn="l" fontAlgn="ctr">
+                        <a:lnSpc>
+                          <a:spcPts val="1200"/>
+                        </a:lnSpc>
+                        <a:buNone/>
+                      </a:pPr>
+                      <a:r>
+                        <a:rPr lang="en-US" sz="1000" b="0" i="0" u="none" strike="noStrike">
+                          <a:effectLst/>
+                          <a:latin typeface="Times New Roman" panose="02020603050405020304" pitchFamily="18" charset="0"/>
+                          <a:ea typeface="Times New Roman" panose="02020603050405020304" pitchFamily="18" charset="0"/>
+                          <a:cs typeface="Times New Roman" panose="02020603050405020304" pitchFamily="18" charset="0"/>
+                        </a:rPr>
+                        <a:t>Create or oversee group study sessions.</a:t>
+                      </a:r>
+                      <a:endParaRPr lang="en-US" sz="1600" b="0" i="0" u="none" strike="noStrike">
+                        <a:effectLst/>
+                        <a:latin typeface="Arial" panose="020B0604020202020204" pitchFamily="34" charset="0"/>
+                      </a:endParaRPr>
+                    </a:p>
+                  </a:txBody>
+                  <a:tcPr marL="8307" marR="8307" marT="8307" marB="8307" anchor="ctr">
+                    <a:lnL>
+                      <a:noFill/>
+                    </a:lnL>
+                    <a:lnR>
+                      <a:noFill/>
+                    </a:lnR>
+                    <a:lnT>
+                      <a:noFill/>
+                    </a:lnT>
+                    <a:lnB>
+                      <a:noFill/>
+                    </a:lnB>
+                    <a:noFill/>
+                  </a:tcPr>
+                </a:tc>
+                <a:tc>
+                  <a:txBody>
+                    <a:bodyPr/>
+                    <a:lstStyle/>
+                    <a:p>
+                      <a:pPr marL="0" marR="0" algn="l" fontAlgn="ctr">
+                        <a:lnSpc>
+                          <a:spcPts val="1200"/>
+                        </a:lnSpc>
+                        <a:buNone/>
+                      </a:pPr>
+                      <a:r>
+                        <a:rPr lang="en-US" sz="1000" b="0" i="0" u="none" strike="noStrike" dirty="0">
+                          <a:effectLst/>
+                          <a:latin typeface="Times New Roman" panose="02020603050405020304" pitchFamily="18" charset="0"/>
+                          <a:ea typeface="Times New Roman" panose="02020603050405020304" pitchFamily="18" charset="0"/>
+                          <a:cs typeface="Times New Roman" panose="02020603050405020304" pitchFamily="18" charset="0"/>
+                        </a:rPr>
+                        <a:t>Moderate</a:t>
+                      </a:r>
+                      <a:endParaRPr lang="en-US" sz="1600" b="0" i="0" u="none" strike="noStrike" dirty="0">
+                        <a:effectLst/>
+                        <a:latin typeface="Arial" panose="020B0604020202020204" pitchFamily="34" charset="0"/>
+                      </a:endParaRPr>
+                    </a:p>
+                  </a:txBody>
+                  <a:tcPr marL="8307" marR="8307" marT="8307" marB="8307" anchor="ctr">
+                    <a:lnL>
+                      <a:noFill/>
+                    </a:lnL>
+                    <a:lnR>
+                      <a:noFill/>
+                    </a:lnR>
+                    <a:lnT>
+                      <a:noFill/>
+                    </a:lnT>
+                    <a:lnB>
+                      <a:noFill/>
+                    </a:lnB>
+                    <a:noFill/>
+                  </a:tcPr>
+                </a:tc>
+                <a:tc>
+                  <a:txBody>
+                    <a:bodyPr/>
+                    <a:lstStyle/>
+                    <a:p>
+                      <a:pPr marL="0" marR="0" algn="l" fontAlgn="ctr">
+                        <a:lnSpc>
+                          <a:spcPts val="1200"/>
+                        </a:lnSpc>
+                        <a:buNone/>
+                      </a:pPr>
+                      <a:r>
+                        <a:rPr lang="en-US" sz="1000" b="0" i="0" u="none" strike="noStrike">
+                          <a:effectLst/>
+                          <a:latin typeface="Times New Roman" panose="02020603050405020304" pitchFamily="18" charset="0"/>
+                          <a:ea typeface="Times New Roman" panose="02020603050405020304" pitchFamily="18" charset="0"/>
+                          <a:cs typeface="Times New Roman" panose="02020603050405020304" pitchFamily="18" charset="0"/>
+                        </a:rPr>
+                        <a:t>Weekly</a:t>
+                      </a:r>
+                      <a:endParaRPr lang="en-US" sz="1600" b="0" i="0" u="none" strike="noStrike">
+                        <a:effectLst/>
+                        <a:latin typeface="Arial" panose="020B0604020202020204" pitchFamily="34" charset="0"/>
+                      </a:endParaRPr>
+                    </a:p>
+                  </a:txBody>
+                  <a:tcPr marL="8307" marR="8307" marT="8307" marB="8307" anchor="ctr">
+                    <a:lnL>
+                      <a:noFill/>
+                    </a:lnL>
+                    <a:lnR>
+                      <a:noFill/>
+                    </a:lnR>
+                    <a:lnT>
+                      <a:noFill/>
+                    </a:lnT>
+                    <a:lnB>
+                      <a:noFill/>
+                    </a:lnB>
+                    <a:noFill/>
+                  </a:tcPr>
+                </a:tc>
+                <a:extLst>
+                  <a:ext uri="{0D108BD9-81ED-4DB2-BD59-A6C34878D82A}">
+                    <a16:rowId xmlns:a16="http://schemas.microsoft.com/office/drawing/2014/main" val="734647132"/>
+                  </a:ext>
+                </a:extLst>
+              </a:tr>
+              <a:tr h="320966">
+                <a:tc>
+                  <a:txBody>
+                    <a:bodyPr/>
+                    <a:lstStyle/>
+                    <a:p>
+                      <a:pPr marL="0" marR="0" algn="l" fontAlgn="ctr">
+                        <a:lnSpc>
+                          <a:spcPts val="1200"/>
+                        </a:lnSpc>
+                        <a:buNone/>
+                      </a:pPr>
+                      <a:r>
+                        <a:rPr lang="en-US" sz="1000" b="0" i="0" u="none" strike="noStrike">
+                          <a:effectLst/>
+                          <a:latin typeface="Times New Roman" panose="02020603050405020304" pitchFamily="18" charset="0"/>
+                          <a:ea typeface="Times New Roman" panose="02020603050405020304" pitchFamily="18" charset="0"/>
+                          <a:cs typeface="Times New Roman" panose="02020603050405020304" pitchFamily="18" charset="0"/>
+                        </a:rPr>
+                        <a:t>Administrators:</a:t>
+                      </a:r>
+                      <a:endParaRPr lang="en-US" sz="1600" b="0" i="0" u="none" strike="noStrike">
+                        <a:effectLst/>
+                        <a:latin typeface="Arial" panose="020B0604020202020204" pitchFamily="34" charset="0"/>
+                      </a:endParaRPr>
+                    </a:p>
+                  </a:txBody>
+                  <a:tcPr marL="8307" marR="8307" marT="8307" marB="8307" anchor="ctr">
+                    <a:lnL>
+                      <a:noFill/>
+                    </a:lnL>
+                    <a:lnR>
+                      <a:noFill/>
+                    </a:lnR>
+                    <a:lnT>
+                      <a:noFill/>
+                    </a:lnT>
+                    <a:lnB>
+                      <a:noFill/>
+                    </a:lnB>
+                    <a:noFill/>
+                  </a:tcPr>
+                </a:tc>
+                <a:tc>
+                  <a:txBody>
+                    <a:bodyPr/>
+                    <a:lstStyle/>
+                    <a:p>
+                      <a:pPr marL="0" marR="0" algn="l" fontAlgn="ctr">
+                        <a:lnSpc>
+                          <a:spcPts val="1200"/>
+                        </a:lnSpc>
+                        <a:buNone/>
+                      </a:pPr>
+                      <a:r>
+                        <a:rPr lang="en-US" sz="1000" b="0" i="0" u="none" strike="noStrike">
+                          <a:effectLst/>
+                          <a:latin typeface="Times New Roman" panose="02020603050405020304" pitchFamily="18" charset="0"/>
+                          <a:ea typeface="Times New Roman" panose="02020603050405020304" pitchFamily="18" charset="0"/>
+                          <a:cs typeface="Times New Roman" panose="02020603050405020304" pitchFamily="18" charset="0"/>
+                        </a:rPr>
+                        <a:t>Manage user accounts, data integrity, and system maintenance.</a:t>
+                      </a:r>
+                      <a:endParaRPr lang="en-US" sz="1600" b="0" i="0" u="none" strike="noStrike">
+                        <a:effectLst/>
+                        <a:latin typeface="Arial" panose="020B0604020202020204" pitchFamily="34" charset="0"/>
+                      </a:endParaRPr>
+                    </a:p>
+                  </a:txBody>
+                  <a:tcPr marL="8307" marR="8307" marT="8307" marB="8307" anchor="ctr">
+                    <a:lnL>
+                      <a:noFill/>
+                    </a:lnL>
+                    <a:lnR>
+                      <a:noFill/>
+                    </a:lnR>
+                    <a:lnT>
+                      <a:noFill/>
+                    </a:lnT>
+                    <a:lnB>
+                      <a:noFill/>
+                    </a:lnB>
+                    <a:noFill/>
+                  </a:tcPr>
+                </a:tc>
+                <a:tc>
+                  <a:txBody>
+                    <a:bodyPr/>
+                    <a:lstStyle/>
+                    <a:p>
+                      <a:pPr marL="0" marR="0" algn="l" fontAlgn="ctr">
+                        <a:lnSpc>
+                          <a:spcPts val="1200"/>
+                        </a:lnSpc>
+                        <a:buNone/>
+                      </a:pPr>
+                      <a:r>
+                        <a:rPr lang="en-US" sz="1000" b="0" i="0" u="none" strike="noStrike">
+                          <a:effectLst/>
+                          <a:latin typeface="Times New Roman" panose="02020603050405020304" pitchFamily="18" charset="0"/>
+                          <a:ea typeface="Times New Roman" panose="02020603050405020304" pitchFamily="18" charset="0"/>
+                          <a:cs typeface="Times New Roman" panose="02020603050405020304" pitchFamily="18" charset="0"/>
+                        </a:rPr>
+                        <a:t>Advanced</a:t>
+                      </a:r>
+                      <a:endParaRPr lang="en-US" sz="1600" b="0" i="0" u="none" strike="noStrike">
+                        <a:effectLst/>
+                        <a:latin typeface="Arial" panose="020B0604020202020204" pitchFamily="34" charset="0"/>
+                      </a:endParaRPr>
+                    </a:p>
+                  </a:txBody>
+                  <a:tcPr marL="8307" marR="8307" marT="8307" marB="8307" anchor="ctr">
+                    <a:lnL>
+                      <a:noFill/>
+                    </a:lnL>
+                    <a:lnR>
+                      <a:noFill/>
+                    </a:lnR>
+                    <a:lnT>
+                      <a:noFill/>
+                    </a:lnT>
+                    <a:lnB>
+                      <a:noFill/>
+                    </a:lnB>
+                    <a:noFill/>
+                  </a:tcPr>
+                </a:tc>
+                <a:tc>
+                  <a:txBody>
+                    <a:bodyPr/>
+                    <a:lstStyle/>
+                    <a:p>
+                      <a:pPr marL="0" marR="0" algn="l" fontAlgn="ctr">
+                        <a:lnSpc>
+                          <a:spcPts val="1200"/>
+                        </a:lnSpc>
+                        <a:buNone/>
+                      </a:pPr>
+                      <a:r>
+                        <a:rPr lang="en-US" sz="1000" b="0" i="0" u="none" strike="noStrike" dirty="0">
+                          <a:effectLst/>
+                          <a:latin typeface="Times New Roman" panose="02020603050405020304" pitchFamily="18" charset="0"/>
+                          <a:ea typeface="Times New Roman" panose="02020603050405020304" pitchFamily="18" charset="0"/>
+                          <a:cs typeface="Times New Roman" panose="02020603050405020304" pitchFamily="18" charset="0"/>
+                        </a:rPr>
+                        <a:t>As needed</a:t>
+                      </a:r>
+                      <a:endParaRPr lang="en-US" sz="1600" b="0" i="0" u="none" strike="noStrike" dirty="0">
+                        <a:effectLst/>
+                        <a:latin typeface="Arial" panose="020B0604020202020204" pitchFamily="34" charset="0"/>
+                      </a:endParaRPr>
+                    </a:p>
+                  </a:txBody>
+                  <a:tcPr marL="8307" marR="8307" marT="8307" marB="8307" anchor="ctr">
+                    <a:lnL>
+                      <a:noFill/>
+                    </a:lnL>
+                    <a:lnR>
+                      <a:noFill/>
+                    </a:lnR>
+                    <a:lnT>
+                      <a:noFill/>
+                    </a:lnT>
+                    <a:lnB>
+                      <a:noFill/>
+                    </a:lnB>
+                    <a:noFill/>
+                  </a:tcPr>
+                </a:tc>
+                <a:extLst>
+                  <a:ext uri="{0D108BD9-81ED-4DB2-BD59-A6C34878D82A}">
+                    <a16:rowId xmlns:a16="http://schemas.microsoft.com/office/drawing/2014/main" val="2264448489"/>
+                  </a:ext>
+                </a:extLst>
+              </a:tr>
+            </a:tbl>
+          </a:graphicData>
+        </a:graphic>
+      </p:graphicFrame>
+    </p:spTree>
+    <p:extLst>
+      <p:ext uri="{BB962C8B-B14F-4D97-AF65-F5344CB8AC3E}">
+        <p14:creationId xmlns:p14="http://schemas.microsoft.com/office/powerpoint/2010/main" val="2141420699"/>
+      </p:ext>
+    </p:extLst>
+  </p:cSld>
+  <p:clrMapOvr>
+    <a:masterClrMapping/>
+  </p:clrMapOvr>
+</p:sld>
+</file>
+
+<file path=ppt/slides/slide6.xml><?xml version="1.0" encoding="utf-8"?>
+<p:sld xmlns:a="http://schemas.openxmlformats.org/drawingml/2006/main" xmlns:r="http://schemas.openxmlformats.org/officeDocument/2006/relationships" xmlns:p="http://schemas.openxmlformats.org/presentationml/2006/main">
+  <p:cSld>
+    <p:spTree>
+      <p:nvGrpSpPr>
+        <p:cNvPr id="1" name=""/>
+        <p:cNvGrpSpPr/>
+        <p:nvPr/>
+      </p:nvGrpSpPr>
+      <p:grpSpPr>
+        <a:xfrm>
+          <a:off x="0" y="0"/>
+          <a:ext cx="0" cy="0"/>
+          <a:chOff x="0" y="0"/>
+          <a:chExt cx="0" cy="0"/>
+        </a:xfrm>
+      </p:grpSpPr>
+      <p:sp>
+        <p:nvSpPr>
+          <p:cNvPr id="2" name="Title 1">
+            <a:extLst>
+              <a:ext uri="{FF2B5EF4-FFF2-40B4-BE49-F238E27FC236}">
+                <a16:creationId xmlns:a16="http://schemas.microsoft.com/office/drawing/2014/main" id="{3A048030-34E3-5373-2038-A447124E9A6C}"/>
+              </a:ext>
+            </a:extLst>
+          </p:cNvPr>
+          <p:cNvSpPr>
+            <a:spLocks noGrp="1"/>
+          </p:cNvSpPr>
+          <p:nvPr>
+            <p:ph type="title"/>
+          </p:nvPr>
+        </p:nvSpPr>
+        <p:spPr/>
+        <p:txBody>
+          <a:bodyPr/>
+          <a:lstStyle/>
+          <a:p>
+            <a:r>
+              <a:rPr lang="en-US" dirty="0"/>
+              <a:t>Overview</a:t>
+            </a:r>
+          </a:p>
+        </p:txBody>
+      </p:sp>
+      <p:sp>
+        <p:nvSpPr>
+          <p:cNvPr id="3" name="TextBox 2">
+            <a:extLst>
+              <a:ext uri="{FF2B5EF4-FFF2-40B4-BE49-F238E27FC236}">
+                <a16:creationId xmlns:a16="http://schemas.microsoft.com/office/drawing/2014/main" id="{906A5458-033A-76F0-2C5B-E0EC81D4301E}"/>
+              </a:ext>
+            </a:extLst>
+          </p:cNvPr>
+          <p:cNvSpPr txBox="1"/>
+          <p:nvPr/>
+        </p:nvSpPr>
+        <p:spPr>
+          <a:xfrm>
+            <a:off x="838200" y="1590261"/>
+            <a:ext cx="7692887" cy="6001643"/>
+          </a:xfrm>
+          <a:prstGeom prst="rect">
+            <a:avLst/>
+          </a:prstGeom>
+          <a:noFill/>
+        </p:spPr>
+        <p:txBody>
+          <a:bodyPr wrap="square" rtlCol="0">
+            <a:spAutoFit/>
+          </a:bodyPr>
+          <a:lstStyle/>
+          <a:p>
+            <a:r>
+              <a:rPr lang="en-US" sz="1400" b="1" dirty="0">
+                <a:latin typeface="Arial" panose="020B0604020202020204" pitchFamily="34" charset="0"/>
+                <a:cs typeface="Arial" panose="020B0604020202020204" pitchFamily="34" charset="0"/>
+              </a:rPr>
+              <a:t>5. Design &amp; Implementation Constraints:</a:t>
+            </a:r>
+          </a:p>
+          <a:p>
+            <a:pPr marL="285750" lvl="0" indent="-285750">
+              <a:buFont typeface="Arial" panose="020B0604020202020204" pitchFamily="34" charset="0"/>
+              <a:buChar char="•"/>
+            </a:pPr>
+            <a:r>
+              <a:rPr lang="en-US" sz="1400" b="1" dirty="0">
+                <a:latin typeface="Arial" panose="020B0604020202020204" pitchFamily="34" charset="0"/>
+                <a:cs typeface="Arial" panose="020B0604020202020204" pitchFamily="34" charset="0"/>
+              </a:rPr>
+              <a:t> </a:t>
+            </a:r>
+            <a:r>
+              <a:rPr lang="en-US" sz="1400" dirty="0">
+                <a:latin typeface="Arial" panose="020B0604020202020204" pitchFamily="34" charset="0"/>
+                <a:cs typeface="Arial" panose="020B0604020202020204" pitchFamily="34" charset="0"/>
+              </a:rPr>
+              <a:t>Must be implemented using </a:t>
+            </a:r>
+            <a:r>
+              <a:rPr lang="en-US" sz="1400" b="1" dirty="0">
+                <a:latin typeface="Arial" panose="020B0604020202020204" pitchFamily="34" charset="0"/>
+                <a:cs typeface="Arial" panose="020B0604020202020204" pitchFamily="34" charset="0"/>
+              </a:rPr>
+              <a:t>React</a:t>
+            </a:r>
+            <a:r>
+              <a:rPr lang="en-US" sz="1400" dirty="0">
+                <a:latin typeface="Arial" panose="020B0604020202020204" pitchFamily="34" charset="0"/>
+                <a:cs typeface="Arial" panose="020B0604020202020204" pitchFamily="34" charset="0"/>
+              </a:rPr>
+              <a:t>, </a:t>
+            </a:r>
+            <a:r>
+              <a:rPr lang="en-US" sz="1400" b="1" dirty="0">
+                <a:latin typeface="Arial" panose="020B0604020202020204" pitchFamily="34" charset="0"/>
+                <a:cs typeface="Arial" panose="020B0604020202020204" pitchFamily="34" charset="0"/>
+              </a:rPr>
+              <a:t>Node.js</a:t>
+            </a:r>
+            <a:r>
+              <a:rPr lang="en-US" sz="1400" dirty="0">
+                <a:latin typeface="Arial" panose="020B0604020202020204" pitchFamily="34" charset="0"/>
+                <a:cs typeface="Arial" panose="020B0604020202020204" pitchFamily="34" charset="0"/>
+              </a:rPr>
+              <a:t>, </a:t>
+            </a:r>
+            <a:r>
+              <a:rPr lang="en-US" sz="1400" b="1" dirty="0">
+                <a:latin typeface="Arial" panose="020B0604020202020204" pitchFamily="34" charset="0"/>
+                <a:cs typeface="Arial" panose="020B0604020202020204" pitchFamily="34" charset="0"/>
+              </a:rPr>
+              <a:t>Express</a:t>
+            </a:r>
+            <a:r>
+              <a:rPr lang="en-US" sz="1400" dirty="0">
+                <a:latin typeface="Arial" panose="020B0604020202020204" pitchFamily="34" charset="0"/>
+                <a:cs typeface="Arial" panose="020B0604020202020204" pitchFamily="34" charset="0"/>
+              </a:rPr>
+              <a:t>, and </a:t>
+            </a:r>
+            <a:r>
+              <a:rPr lang="en-US" sz="1400" b="1" dirty="0">
+                <a:latin typeface="Arial" panose="020B0604020202020204" pitchFamily="34" charset="0"/>
+                <a:cs typeface="Arial" panose="020B0604020202020204" pitchFamily="34" charset="0"/>
+              </a:rPr>
+              <a:t>PostgreSQL</a:t>
+            </a:r>
+            <a:r>
+              <a:rPr lang="en-US" sz="1400" dirty="0">
+                <a:latin typeface="Arial" panose="020B0604020202020204" pitchFamily="34" charset="0"/>
+                <a:cs typeface="Arial" panose="020B0604020202020204" pitchFamily="34" charset="0"/>
+              </a:rPr>
+              <a:t>.</a:t>
+            </a:r>
+          </a:p>
+          <a:p>
+            <a:pPr marL="285750" lvl="0" indent="-285750">
+              <a:buFont typeface="Arial" panose="020B0604020202020204" pitchFamily="34" charset="0"/>
+              <a:buChar char="•"/>
+            </a:pPr>
+            <a:r>
+              <a:rPr lang="en-US" sz="1400" dirty="0">
+                <a:latin typeface="Arial" panose="020B0604020202020204" pitchFamily="34" charset="0"/>
+                <a:cs typeface="Arial" panose="020B0604020202020204" pitchFamily="34" charset="0"/>
+              </a:rPr>
+              <a:t>Must use </a:t>
+            </a:r>
+            <a:r>
+              <a:rPr lang="en-US" sz="1400" b="1" dirty="0">
+                <a:latin typeface="Arial" panose="020B0604020202020204" pitchFamily="34" charset="0"/>
+                <a:cs typeface="Arial" panose="020B0604020202020204" pitchFamily="34" charset="0"/>
+              </a:rPr>
+              <a:t>Socket.io</a:t>
+            </a:r>
+            <a:r>
+              <a:rPr lang="en-US" sz="1400" dirty="0">
+                <a:latin typeface="Arial" panose="020B0604020202020204" pitchFamily="34" charset="0"/>
+                <a:cs typeface="Arial" panose="020B0604020202020204" pitchFamily="34" charset="0"/>
+              </a:rPr>
+              <a:t> for real-time study circle and messaging functionality.</a:t>
+            </a:r>
+          </a:p>
+          <a:p>
+            <a:pPr marL="285750" lvl="0" indent="-285750">
+              <a:buFont typeface="Arial" panose="020B0604020202020204" pitchFamily="34" charset="0"/>
+              <a:buChar char="•"/>
+            </a:pPr>
+            <a:r>
+              <a:rPr lang="en-US" sz="1400" dirty="0">
+                <a:latin typeface="Arial" panose="020B0604020202020204" pitchFamily="34" charset="0"/>
+                <a:cs typeface="Arial" panose="020B0604020202020204" pitchFamily="34" charset="0"/>
+              </a:rPr>
+              <a:t>Must follow </a:t>
+            </a:r>
+            <a:r>
+              <a:rPr lang="en-US" sz="1400" b="1" dirty="0">
+                <a:latin typeface="Arial" panose="020B0604020202020204" pitchFamily="34" charset="0"/>
+                <a:cs typeface="Arial" panose="020B0604020202020204" pitchFamily="34" charset="0"/>
+              </a:rPr>
+              <a:t>GDPR</a:t>
+            </a:r>
+            <a:r>
+              <a:rPr lang="en-US" sz="1400" dirty="0">
+                <a:latin typeface="Arial" panose="020B0604020202020204" pitchFamily="34" charset="0"/>
+                <a:cs typeface="Arial" panose="020B0604020202020204" pitchFamily="34" charset="0"/>
+              </a:rPr>
+              <a:t> and </a:t>
+            </a:r>
+            <a:r>
+              <a:rPr lang="en-US" sz="1400" b="1" dirty="0">
+                <a:latin typeface="Arial" panose="020B0604020202020204" pitchFamily="34" charset="0"/>
+                <a:cs typeface="Arial" panose="020B0604020202020204" pitchFamily="34" charset="0"/>
+              </a:rPr>
+              <a:t>FERPA</a:t>
+            </a:r>
+            <a:r>
+              <a:rPr lang="en-US" sz="1400" dirty="0">
+                <a:latin typeface="Arial" panose="020B0604020202020204" pitchFamily="34" charset="0"/>
+                <a:cs typeface="Arial" panose="020B0604020202020204" pitchFamily="34" charset="0"/>
+              </a:rPr>
+              <a:t> compliance for data security.</a:t>
+            </a:r>
+          </a:p>
+          <a:p>
+            <a:pPr marL="285750" lvl="0" indent="-285750">
+              <a:buFont typeface="Arial" panose="020B0604020202020204" pitchFamily="34" charset="0"/>
+              <a:buChar char="•"/>
+            </a:pPr>
+            <a:r>
+              <a:rPr lang="en-US" sz="1400" dirty="0">
+                <a:latin typeface="Arial" panose="020B0604020202020204" pitchFamily="34" charset="0"/>
+                <a:cs typeface="Arial" panose="020B0604020202020204" pitchFamily="34" charset="0"/>
+              </a:rPr>
+              <a:t>Must use </a:t>
+            </a:r>
+            <a:r>
+              <a:rPr lang="en-US" sz="1400" b="1" dirty="0">
+                <a:latin typeface="Arial" panose="020B0604020202020204" pitchFamily="34" charset="0"/>
+                <a:cs typeface="Arial" panose="020B0604020202020204" pitchFamily="34" charset="0"/>
+              </a:rPr>
+              <a:t>HTTPS</a:t>
+            </a:r>
+            <a:r>
+              <a:rPr lang="en-US" sz="1400" dirty="0">
+                <a:latin typeface="Arial" panose="020B0604020202020204" pitchFamily="34" charset="0"/>
+                <a:cs typeface="Arial" panose="020B0604020202020204" pitchFamily="34" charset="0"/>
+              </a:rPr>
+              <a:t> for secure client-server communication.</a:t>
+            </a:r>
+          </a:p>
+          <a:p>
+            <a:pPr marL="285750" lvl="0" indent="-285750">
+              <a:buFont typeface="Arial" panose="020B0604020202020204" pitchFamily="34" charset="0"/>
+              <a:buChar char="•"/>
+            </a:pPr>
+            <a:r>
+              <a:rPr lang="en-US" sz="1400" dirty="0">
+                <a:latin typeface="Arial" panose="020B0604020202020204" pitchFamily="34" charset="0"/>
+                <a:cs typeface="Arial" panose="020B0604020202020204" pitchFamily="34" charset="0"/>
+              </a:rPr>
+              <a:t>Must ensure page load and response times within </a:t>
+            </a:r>
+            <a:r>
+              <a:rPr lang="en-US" sz="1400" b="1" dirty="0">
+                <a:latin typeface="Arial" panose="020B0604020202020204" pitchFamily="34" charset="0"/>
+                <a:cs typeface="Arial" panose="020B0604020202020204" pitchFamily="34" charset="0"/>
+              </a:rPr>
+              <a:t>3 seconds</a:t>
+            </a:r>
+            <a:r>
+              <a:rPr lang="en-US" sz="1400" dirty="0">
+                <a:latin typeface="Arial" panose="020B0604020202020204" pitchFamily="34" charset="0"/>
+                <a:cs typeface="Arial" panose="020B0604020202020204" pitchFamily="34" charset="0"/>
+              </a:rPr>
+              <a:t> under normal load.</a:t>
+            </a:r>
+          </a:p>
+          <a:p>
+            <a:pPr marL="285750" lvl="0" indent="-285750">
+              <a:buFont typeface="Arial" panose="020B0604020202020204" pitchFamily="34" charset="0"/>
+              <a:buChar char="•"/>
+            </a:pPr>
+            <a:r>
+              <a:rPr lang="en-US" sz="1400" dirty="0">
+                <a:latin typeface="Arial" panose="020B0604020202020204" pitchFamily="34" charset="0"/>
+                <a:cs typeface="Arial" panose="020B0604020202020204" pitchFamily="34" charset="0"/>
+              </a:rPr>
+              <a:t>Must be designed for scalability to support future cloud migration.</a:t>
+            </a:r>
+          </a:p>
+          <a:p>
+            <a:pPr marL="285750" lvl="0" indent="-285750">
+              <a:buFont typeface="Arial" panose="020B0604020202020204" pitchFamily="34" charset="0"/>
+              <a:buChar char="•"/>
+            </a:pPr>
+            <a:endParaRPr lang="en-US" sz="1400" dirty="0">
+              <a:latin typeface="Arial" panose="020B0604020202020204" pitchFamily="34" charset="0"/>
+              <a:cs typeface="Arial" panose="020B0604020202020204" pitchFamily="34" charset="0"/>
+            </a:endParaRPr>
+          </a:p>
+          <a:p>
+            <a:pPr lvl="0"/>
+            <a:r>
+              <a:rPr lang="en-US" sz="1400" b="1" dirty="0">
+                <a:latin typeface="Arial" panose="020B0604020202020204" pitchFamily="34" charset="0"/>
+                <a:cs typeface="Arial" panose="020B0604020202020204" pitchFamily="34" charset="0"/>
+              </a:rPr>
+              <a:t>6. User Documentation: </a:t>
+            </a:r>
+            <a:r>
+              <a:rPr lang="en-US" sz="1400" dirty="0">
+                <a:latin typeface="Arial" panose="020B0604020202020204" pitchFamily="34" charset="0"/>
+                <a:cs typeface="Arial" panose="020B0604020202020204" pitchFamily="34" charset="0"/>
+              </a:rPr>
+              <a:t>User Manual, Quick Start Guide, and FAQ Page, and Developer Documentation(Internal)</a:t>
+            </a:r>
+          </a:p>
+          <a:p>
+            <a:pPr lvl="0"/>
+            <a:endParaRPr lang="en-US" sz="1400" b="1" dirty="0">
+              <a:latin typeface="Arial" panose="020B0604020202020204" pitchFamily="34" charset="0"/>
+              <a:cs typeface="Arial" panose="020B0604020202020204" pitchFamily="34" charset="0"/>
+            </a:endParaRPr>
+          </a:p>
+          <a:p>
+            <a:pPr lvl="0"/>
+            <a:r>
+              <a:rPr lang="en-US" sz="1400" b="1" dirty="0">
+                <a:latin typeface="Arial" panose="020B0604020202020204" pitchFamily="34" charset="0"/>
+                <a:cs typeface="Arial" panose="020B0604020202020204" pitchFamily="34" charset="0"/>
+              </a:rPr>
+              <a:t>7. Assumption and Dependencies</a:t>
+            </a:r>
+            <a:r>
+              <a:rPr lang="en-US" sz="1400" dirty="0">
+                <a:latin typeface="Arial" panose="020B0604020202020204" pitchFamily="34" charset="0"/>
+                <a:cs typeface="Arial" panose="020B0604020202020204" pitchFamily="34" charset="0"/>
+              </a:rPr>
+              <a:t>: </a:t>
+            </a:r>
+          </a:p>
+          <a:p>
+            <a:pPr lvl="0"/>
+            <a:r>
+              <a:rPr lang="en-US" sz="1400" b="1" dirty="0">
+                <a:latin typeface="Arial" panose="020B0604020202020204" pitchFamily="34" charset="0"/>
+                <a:cs typeface="Arial" panose="020B0604020202020204" pitchFamily="34" charset="0"/>
+              </a:rPr>
+              <a:t>Assumptions: </a:t>
+            </a:r>
+          </a:p>
+          <a:p>
+            <a:pPr lvl="0"/>
+            <a:r>
+              <a:rPr lang="en-US" sz="1400" dirty="0">
+                <a:latin typeface="Arial" panose="020B0604020202020204" pitchFamily="34" charset="0"/>
+                <a:cs typeface="Arial" panose="020B0604020202020204" pitchFamily="34" charset="0"/>
+              </a:rPr>
+              <a:t>Users have reliable internet access and a modern browser.</a:t>
+            </a:r>
+          </a:p>
+          <a:p>
+            <a:pPr lvl="0"/>
+            <a:r>
+              <a:rPr lang="en-US" sz="1400" dirty="0">
+                <a:latin typeface="Arial" panose="020B0604020202020204" pitchFamily="34" charset="0"/>
+                <a:cs typeface="Arial" panose="020B0604020202020204" pitchFamily="34" charset="0"/>
+              </a:rPr>
+              <a:t>Users are familiar with basic online collaboration tools.</a:t>
+            </a:r>
+          </a:p>
+          <a:p>
+            <a:pPr lvl="0"/>
+            <a:r>
+              <a:rPr lang="en-US" sz="1400" dirty="0">
+                <a:latin typeface="Arial" panose="020B0604020202020204" pitchFamily="34" charset="0"/>
+                <a:cs typeface="Arial" panose="020B0604020202020204" pitchFamily="34" charset="0"/>
+              </a:rPr>
+              <a:t>Students and tutors will actively engage with the app’s productivity and communication features. </a:t>
+            </a:r>
+          </a:p>
+          <a:p>
+            <a:r>
+              <a:rPr lang="en-US" sz="1400" b="1" dirty="0">
+                <a:latin typeface="Arial" panose="020B0604020202020204" pitchFamily="34" charset="0"/>
+                <a:cs typeface="Arial" panose="020B0604020202020204" pitchFamily="34" charset="0"/>
+              </a:rPr>
+              <a:t>Dependencies:</a:t>
+            </a:r>
+            <a:endParaRPr lang="en-US" sz="1400" dirty="0">
+              <a:latin typeface="Arial" panose="020B0604020202020204" pitchFamily="34" charset="0"/>
+              <a:cs typeface="Arial" panose="020B0604020202020204" pitchFamily="34" charset="0"/>
+            </a:endParaRPr>
+          </a:p>
+          <a:p>
+            <a:pPr lvl="0"/>
+            <a:r>
+              <a:rPr lang="en-US" sz="1400" dirty="0">
+                <a:latin typeface="Arial" panose="020B0604020202020204" pitchFamily="34" charset="0"/>
+                <a:cs typeface="Arial" panose="020B0604020202020204" pitchFamily="34" charset="0"/>
+              </a:rPr>
+              <a:t>Node.js and Express for backend logic.</a:t>
+            </a:r>
+          </a:p>
+          <a:p>
+            <a:pPr lvl="0"/>
+            <a:r>
+              <a:rPr lang="en-US" sz="1400" dirty="0">
+                <a:latin typeface="Arial" panose="020B0604020202020204" pitchFamily="34" charset="0"/>
+                <a:cs typeface="Arial" panose="020B0604020202020204" pitchFamily="34" charset="0"/>
+              </a:rPr>
+              <a:t>PostgreSQL for database management.</a:t>
+            </a:r>
+          </a:p>
+          <a:p>
+            <a:pPr lvl="0"/>
+            <a:r>
+              <a:rPr lang="en-US" sz="1400" dirty="0">
+                <a:latin typeface="Arial" panose="020B0604020202020204" pitchFamily="34" charset="0"/>
+                <a:cs typeface="Arial" panose="020B0604020202020204" pitchFamily="34" charset="0"/>
+              </a:rPr>
+              <a:t>Socket.io for real-time communication.</a:t>
+            </a:r>
+          </a:p>
+          <a:p>
+            <a:pPr lvl="0"/>
+            <a:r>
+              <a:rPr lang="en-US" sz="1400" dirty="0" err="1">
+                <a:latin typeface="Arial" panose="020B0604020202020204" pitchFamily="34" charset="0"/>
+                <a:cs typeface="Arial" panose="020B0604020202020204" pitchFamily="34" charset="0"/>
+              </a:rPr>
+              <a:t>Vercel</a:t>
+            </a:r>
+            <a:r>
+              <a:rPr lang="en-US" sz="1400" dirty="0">
+                <a:latin typeface="Arial" panose="020B0604020202020204" pitchFamily="34" charset="0"/>
+                <a:cs typeface="Arial" panose="020B0604020202020204" pitchFamily="34" charset="0"/>
+              </a:rPr>
+              <a:t> (frontend) and Render (backend) for hosting and deployment</a:t>
+            </a:r>
+            <a:r>
+              <a:rPr lang="en-US" sz="1600" dirty="0">
+                <a:latin typeface="Arial" panose="020B0604020202020204" pitchFamily="34" charset="0"/>
+                <a:cs typeface="Arial" panose="020B0604020202020204" pitchFamily="34" charset="0"/>
+              </a:rPr>
+              <a:t>.</a:t>
+            </a:r>
+          </a:p>
+          <a:p>
+            <a:pPr lvl="0"/>
+            <a:endParaRPr lang="en-US" dirty="0"/>
+          </a:p>
+          <a:p>
+            <a:pPr lvl="0"/>
+            <a:endParaRPr lang="en-US" dirty="0"/>
+          </a:p>
+          <a:p>
+            <a:pPr lvl="0"/>
+            <a:endParaRPr lang="en-US" dirty="0"/>
+          </a:p>
+          <a:p>
+            <a:pPr marL="285750" indent="-285750">
+              <a:buFont typeface="Arial" panose="020B0604020202020204" pitchFamily="34" charset="0"/>
+              <a:buChar char="•"/>
+            </a:pPr>
+            <a:endParaRPr lang="en-US" b="1" dirty="0"/>
+          </a:p>
+        </p:txBody>
+      </p:sp>
+    </p:spTree>
+    <p:extLst>
+      <p:ext uri="{BB962C8B-B14F-4D97-AF65-F5344CB8AC3E}">
+        <p14:creationId xmlns:p14="http://schemas.microsoft.com/office/powerpoint/2010/main" val="3165611677"/>
+      </p:ext>
+    </p:extLst>
+  </p:cSld>
+  <p:clrMapOvr>
+    <a:masterClrMapping/>
+  </p:clrMapOvr>
+</p:sld>
+</file>
+
+<file path=ppt/slides/slide7.xml><?xml version="1.0" encoding="utf-8"?>
 <p:sld xmlns:a="http://schemas.openxmlformats.org/drawingml/2006/main" xmlns:r="http://schemas.openxmlformats.org/officeDocument/2006/relationships" xmlns:p="http://schemas.openxmlformats.org/presentationml/2006/main">
   <p:cSld>
     <p:spTree>
@@ -4647,7 +7304,7 @@
 </p:sld>
 </file>
 
-<file path=ppt/slides/slide5.xml><?xml version="1.0" encoding="utf-8"?>
+<file path=ppt/slides/slide8.xml><?xml version="1.0" encoding="utf-8"?>
 <p:sld xmlns:a="http://schemas.openxmlformats.org/drawingml/2006/main" xmlns:r="http://schemas.openxmlformats.org/officeDocument/2006/relationships" xmlns:p="http://schemas.openxmlformats.org/presentationml/2006/main">
   <p:cSld>
     <p:spTree>
@@ -4711,7 +7368,7 @@
 </p:sld>
 </file>
 
-<file path=ppt/slides/slide6.xml><?xml version="1.0" encoding="utf-8"?>
+<file path=ppt/slides/slide9.xml><?xml version="1.0" encoding="utf-8"?>
 <p:sld xmlns:a="http://schemas.openxmlformats.org/drawingml/2006/main" xmlns:r="http://schemas.openxmlformats.org/officeDocument/2006/relationships" xmlns:p="http://schemas.openxmlformats.org/presentationml/2006/main">
   <p:cSld>
     <p:spTree>
@@ -4766,134 +7423,6 @@
     <p:extLst>
       <p:ext uri="{BB962C8B-B14F-4D97-AF65-F5344CB8AC3E}">
         <p14:creationId xmlns:p14="http://schemas.microsoft.com/office/powerpoint/2010/main" val="739213906"/>
-      </p:ext>
-    </p:extLst>
-  </p:cSld>
-  <p:clrMapOvr>
-    <a:masterClrMapping/>
-  </p:clrMapOvr>
-</p:sld>
-</file>
-
-<file path=ppt/slides/slide7.xml><?xml version="1.0" encoding="utf-8"?>
-<p:sld xmlns:a="http://schemas.openxmlformats.org/drawingml/2006/main" xmlns:r="http://schemas.openxmlformats.org/officeDocument/2006/relationships" xmlns:p="http://schemas.openxmlformats.org/presentationml/2006/main">
-  <p:cSld>
-    <p:spTree>
-      <p:nvGrpSpPr>
-        <p:cNvPr id="1" name="">
-          <a:extLst>
-            <a:ext uri="{FF2B5EF4-FFF2-40B4-BE49-F238E27FC236}">
-              <a16:creationId xmlns:a16="http://schemas.microsoft.com/office/drawing/2014/main" id="{701443C0-5831-67B6-D214-3A26D4C6E323}"/>
-            </a:ext>
-          </a:extLst>
-        </p:cNvPr>
-        <p:cNvGrpSpPr/>
-        <p:nvPr/>
-      </p:nvGrpSpPr>
-      <p:grpSpPr>
-        <a:xfrm>
-          <a:off x="0" y="0"/>
-          <a:ext cx="0" cy="0"/>
-          <a:chOff x="0" y="0"/>
-          <a:chExt cx="0" cy="0"/>
-        </a:xfrm>
-      </p:grpSpPr>
-      <p:sp>
-        <p:nvSpPr>
-          <p:cNvPr id="2" name="Title 1">
-            <a:extLst>
-              <a:ext uri="{FF2B5EF4-FFF2-40B4-BE49-F238E27FC236}">
-                <a16:creationId xmlns:a16="http://schemas.microsoft.com/office/drawing/2014/main" id="{7CA0897B-ED9E-6382-1775-8C38E586EADA}"/>
-              </a:ext>
-            </a:extLst>
-          </p:cNvPr>
-          <p:cNvSpPr>
-            <a:spLocks noGrp="1"/>
-          </p:cNvSpPr>
-          <p:nvPr>
-            <p:ph type="title"/>
-          </p:nvPr>
-        </p:nvSpPr>
-        <p:spPr/>
-        <p:txBody>
-          <a:bodyPr/>
-          <a:lstStyle/>
-          <a:p>
-            <a:r>
-              <a:rPr lang="en-US" dirty="0"/>
-              <a:t>Other Requirements</a:t>
-            </a:r>
-          </a:p>
-        </p:txBody>
-      </p:sp>
-    </p:spTree>
-    <p:extLst>
-      <p:ext uri="{BB962C8B-B14F-4D97-AF65-F5344CB8AC3E}">
-        <p14:creationId xmlns:p14="http://schemas.microsoft.com/office/powerpoint/2010/main" val="2018098577"/>
-      </p:ext>
-    </p:extLst>
-  </p:cSld>
-  <p:clrMapOvr>
-    <a:masterClrMapping/>
-  </p:clrMapOvr>
-</p:sld>
-</file>
-
-<file path=ppt/slides/slide8.xml><?xml version="1.0" encoding="utf-8"?>
-<p:sld xmlns:a="http://schemas.openxmlformats.org/drawingml/2006/main" xmlns:r="http://schemas.openxmlformats.org/officeDocument/2006/relationships" xmlns:p="http://schemas.openxmlformats.org/presentationml/2006/main">
-  <p:cSld>
-    <p:spTree>
-      <p:nvGrpSpPr>
-        <p:cNvPr id="1" name="">
-          <a:extLst>
-            <a:ext uri="{FF2B5EF4-FFF2-40B4-BE49-F238E27FC236}">
-              <a16:creationId xmlns:a16="http://schemas.microsoft.com/office/drawing/2014/main" id="{C2D24A11-D06A-C1CA-15C1-CF4950357AE2}"/>
-            </a:ext>
-          </a:extLst>
-        </p:cNvPr>
-        <p:cNvGrpSpPr/>
-        <p:nvPr/>
-      </p:nvGrpSpPr>
-      <p:grpSpPr>
-        <a:xfrm>
-          <a:off x="0" y="0"/>
-          <a:ext cx="0" cy="0"/>
-          <a:chOff x="0" y="0"/>
-          <a:chExt cx="0" cy="0"/>
-        </a:xfrm>
-      </p:grpSpPr>
-      <p:sp>
-        <p:nvSpPr>
-          <p:cNvPr id="2" name="Title 1">
-            <a:extLst>
-              <a:ext uri="{FF2B5EF4-FFF2-40B4-BE49-F238E27FC236}">
-                <a16:creationId xmlns:a16="http://schemas.microsoft.com/office/drawing/2014/main" id="{B7DE63B3-AF50-6302-048B-9AE131B90500}"/>
-              </a:ext>
-            </a:extLst>
-          </p:cNvPr>
-          <p:cNvSpPr>
-            <a:spLocks noGrp="1"/>
-          </p:cNvSpPr>
-          <p:nvPr>
-            <p:ph type="title"/>
-          </p:nvPr>
-        </p:nvSpPr>
-        <p:spPr/>
-        <p:txBody>
-          <a:bodyPr/>
-          <a:lstStyle/>
-          <a:p>
-            <a:r>
-              <a:rPr lang="en-US" dirty="0"/>
-              <a:t>User stories</a:t>
-            </a:r>
-          </a:p>
-        </p:txBody>
-      </p:sp>
-    </p:spTree>
-    <p:extLst>
-      <p:ext uri="{BB962C8B-B14F-4D97-AF65-F5344CB8AC3E}">
-        <p14:creationId xmlns:p14="http://schemas.microsoft.com/office/powerpoint/2010/main" val="2082572573"/>
       </p:ext>
     </p:extLst>
   </p:cSld>
